--- a/2.8/1.pptx
+++ b/2.8/1.pptx
@@ -1,9 +1,12 @@
 
 <file path=ppt/presentation.xml><?xml version="1.0" encoding="utf-8"?>
-<p:presentation xmlns:a="http://schemas.openxmlformats.org/drawingml/2006/main" xmlns:r="http://schemas.openxmlformats.org/officeDocument/2006/relationships" xmlns:p="http://schemas.openxmlformats.org/presentationml/2006/main" saveSubsetFonts="true" autoCompressPictures="0" embedTrueTypeFonts="true">
+<p:presentation xmlns:a="http://schemas.openxmlformats.org/drawingml/2006/main" xmlns:r="http://schemas.openxmlformats.org/officeDocument/2006/relationships" xmlns:p="http://schemas.openxmlformats.org/presentationml/2006/main" embedTrueTypeFonts="1" saveSubsetFonts="1" autoCompressPictures="0">
   <p:sldMasterIdLst>
     <p:sldMasterId id="2147483648" r:id="rId1"/>
   </p:sldMasterIdLst>
+  <p:notesMasterIdLst>
+    <p:notesMasterId r:id="rId12"/>
+  </p:notesMasterIdLst>
   <p:sldIdLst>
     <p:sldId id="256" r:id="rId2"/>
     <p:sldId id="257" r:id="rId3"/>
@@ -16,23 +19,21 @@
     <p:sldId id="264" r:id="rId10"/>
     <p:sldId id="265" r:id="rId11"/>
   </p:sldIdLst>
-  <p:notesMasterIdLst>
-    <p:notesMasterId r:id="rId12"/>
-  </p:notesMasterIdLst>
-  <p:sldSz cx="12191695" cy="6858000"/>
-  <p:notesSz cx="6858000" cy="12191695"/>
+  <p:sldSz cx="12192000" cy="6858000"/>
+  <p:notesSz cx="6858000" cy="12192000"/>
   <p:embeddedFontLst>
     <p:embeddedFont>
-      <p:font typeface="Montserrat Bold"/>
-      <p:regular r:id="rId201314"/>
+      <p:font typeface="Montserrat Bold" panose="020B0604020202020204" charset="-52"/>
+      <p:regular r:id="rId13"/>
     </p:embeddedFont>
     <p:embeddedFont>
-      <p:font typeface="Open Sans Bold"/>
-      <p:regular r:id="rId201315"/>
+      <p:font typeface="Open Sans" panose="020B0606030504020204" pitchFamily="34" charset="0"/>
+      <p:regular r:id="rId14"/>
+      <p:bold r:id="rId15"/>
     </p:embeddedFont>
     <p:embeddedFont>
-      <p:font typeface="Open Sans"/>
-      <p:regular r:id="rId201316"/>
+      <p:font typeface="Open Sans Bold" panose="020B0806030504020204" charset="0"/>
+      <p:regular r:id="rId16"/>
     </p:embeddedFont>
   </p:embeddedFontLst>
   <p:defaultTextStyle>
@@ -127,6 +128,11 @@
       </a:defRPr>
     </a:lvl9pPr>
   </p:defaultTextStyle>
+  <p:extLst>
+    <p:ext uri="{EFAFB233-063F-42B5-8137-9DF3F51BA10A}">
+      <p15:sldGuideLst xmlns:p15="http://schemas.microsoft.com/office/powerpoint/2012/main"/>
+    </p:ext>
+  </p:extLst>
 </p:presentation>
 </file>
 
@@ -152,234 +158,10 @@
           <a:chExt cx="0" cy="0"/>
         </a:xfrm>
       </p:grpSpPr>
-      <p:sp>
-        <p:nvSpPr>
-          <p:cNvPr id="2" name="Header Placeholder 1"/>
-          <p:cNvSpPr>
-            <a:spLocks noGrp="1"/>
-          </p:cNvSpPr>
-          <p:nvPr>
-            <p:ph type="hdr" sz="quarter"/>
-          </p:nvPr>
-        </p:nvSpPr>
-        <p:spPr>
-          <a:xfrm>
-            <a:off x="0" y="0"/>
-            <a:ext cx="2971800" cy="458788"/>
-          </a:xfrm>
-          <a:prstGeom prst="rect">
-            <a:avLst/>
-          </a:prstGeom>
-        </p:spPr>
-        <p:txBody>
-          <a:bodyPr vert="horz" lIns="91440" tIns="45720" rIns="91440" bIns="45720" rtlCol="0"/>
-          <a:lstStyle>
-            <a:lvl1pPr algn="l">
-              <a:defRPr sz="1200"/>
-            </a:lvl1pPr>
-          </a:lstStyle>
-          <a:p>
-            <a:endParaRPr lang="en-US"/>
-          </a:p>
-        </p:txBody>
-      </p:sp>
-      <p:sp>
-        <p:nvSpPr>
-          <p:cNvPr id="3" name="Date Placeholder 2"/>
-          <p:cNvSpPr>
-            <a:spLocks noGrp="1"/>
-          </p:cNvSpPr>
-          <p:nvPr>
-            <p:ph type="dt" idx="1"/>
-          </p:nvPr>
-        </p:nvSpPr>
-        <p:spPr>
-          <a:xfrm>
-            <a:off x="3884613" y="0"/>
-            <a:ext cx="2971800" cy="458788"/>
-          </a:xfrm>
-          <a:prstGeom prst="rect">
-            <a:avLst/>
-          </a:prstGeom>
-        </p:spPr>
-        <p:txBody>
-          <a:bodyPr vert="horz" lIns="91440" tIns="45720" rIns="91440" bIns="45720" rtlCol="0"/>
-          <a:lstStyle>
-            <a:lvl1pPr algn="r">
-              <a:defRPr sz="1200"/>
-            </a:lvl1pPr>
-          </a:lstStyle>
-          <a:p>
-            <a:fld id="{5282F153-3F37-0F45-9E97-73ACFA13230C}" type="datetimeFigureOut">
-              <a:rPr lang="en-US"/>
-              <a:t>7/23/19</a:t>
-            </a:fld>
-            <a:endParaRPr lang="en-US"/>
-          </a:p>
-        </p:txBody>
-      </p:sp>
-      <p:sp>
-        <p:nvSpPr>
-          <p:cNvPr id="4" name="Slide Image Placeholder 3"/>
-          <p:cNvSpPr>
-            <a:spLocks noGrp="1" noRot="1" noChangeAspect="1"/>
-          </p:cNvSpPr>
-          <p:nvPr>
-            <p:ph type="sldImg" idx="2"/>
-          </p:nvPr>
-        </p:nvSpPr>
-        <p:spPr>
-          <a:xfrm>
-            <a:off x="685800" y="1143000"/>
-            <a:ext cx="5486400" cy="3086100"/>
-          </a:xfrm>
-          <a:prstGeom prst="rect">
-            <a:avLst/>
-          </a:prstGeom>
-          <a:noFill/>
-          <a:ln w="12700">
-            <a:solidFill>
-              <a:prstClr val="black"/>
-            </a:solidFill>
-          </a:ln>
-        </p:spPr>
-        <p:txBody>
-          <a:bodyPr vert="horz" lIns="91440" tIns="45720" rIns="91440" bIns="45720" rtlCol="0" anchor="ctr"/>
-          <a:lstStyle/>
-          <a:p>
-            <a:endParaRPr lang="en-US"/>
-          </a:p>
-        </p:txBody>
-      </p:sp>
-      <p:sp>
-        <p:nvSpPr>
-          <p:cNvPr id="5" name="Notes Placeholder 4"/>
-          <p:cNvSpPr>
-            <a:spLocks noGrp="1"/>
-          </p:cNvSpPr>
-          <p:nvPr>
-            <p:ph type="body" sz="quarter" idx="3"/>
-          </p:nvPr>
-        </p:nvSpPr>
-        <p:spPr>
-          <a:xfrm>
-            <a:off x="685800" y="4400550"/>
-            <a:ext cx="5486400" cy="3600450"/>
-          </a:xfrm>
-          <a:prstGeom prst="rect">
-            <a:avLst/>
-          </a:prstGeom>
-        </p:spPr>
-        <p:txBody>
-          <a:bodyPr vert="horz" lIns="91440" tIns="45720" rIns="91440" bIns="45720" rtlCol="0"/>
-          <a:lstStyle/>
-          <a:p>
-            <a:pPr lvl="0"/>
-            <a:r>
-              <a:rPr lang="en-US"/>
-              <a:t>Click to edit Master text styles</a:t>
-            </a:r>
-          </a:p>
-          <a:p>
-            <a:pPr lvl="1"/>
-            <a:r>
-              <a:rPr lang="en-US"/>
-              <a:t>Second level</a:t>
-            </a:r>
-          </a:p>
-          <a:p>
-            <a:pPr lvl="2"/>
-            <a:r>
-              <a:rPr lang="en-US"/>
-              <a:t>Third level</a:t>
-            </a:r>
-          </a:p>
-          <a:p>
-            <a:pPr lvl="3"/>
-            <a:r>
-              <a:rPr lang="en-US"/>
-              <a:t>Fourth level</a:t>
-            </a:r>
-          </a:p>
-          <a:p>
-            <a:pPr lvl="4"/>
-            <a:r>
-              <a:rPr lang="en-US"/>
-              <a:t>Fifth level</a:t>
-            </a:r>
-          </a:p>
-        </p:txBody>
-      </p:sp>
-      <p:sp>
-        <p:nvSpPr>
-          <p:cNvPr id="6" name="Footer Placeholder 5"/>
-          <p:cNvSpPr>
-            <a:spLocks noGrp="1"/>
-          </p:cNvSpPr>
-          <p:nvPr>
-            <p:ph type="ftr" sz="quarter" idx="4"/>
-          </p:nvPr>
-        </p:nvSpPr>
-        <p:spPr>
-          <a:xfrm>
-            <a:off x="0" y="8685213"/>
-            <a:ext cx="2971800" cy="458787"/>
-          </a:xfrm>
-          <a:prstGeom prst="rect">
-            <a:avLst/>
-          </a:prstGeom>
-        </p:spPr>
-        <p:txBody>
-          <a:bodyPr vert="horz" lIns="91440" tIns="45720" rIns="91440" bIns="45720" rtlCol="0" anchor="b"/>
-          <a:lstStyle>
-            <a:lvl1pPr algn="l">
-              <a:defRPr sz="1200"/>
-            </a:lvl1pPr>
-          </a:lstStyle>
-          <a:p>
-            <a:endParaRPr lang="en-US"/>
-          </a:p>
-        </p:txBody>
-      </p:sp>
-      <p:sp>
-        <p:nvSpPr>
-          <p:cNvPr id="7" name="Slide Number Placeholder 6"/>
-          <p:cNvSpPr>
-            <a:spLocks noGrp="1"/>
-          </p:cNvSpPr>
-          <p:nvPr>
-            <p:ph type="sldNum" sz="quarter" idx="5"/>
-          </p:nvPr>
-        </p:nvSpPr>
-        <p:spPr>
-          <a:xfrm>
-            <a:off x="3884613" y="8685213"/>
-            <a:ext cx="2971800" cy="458787"/>
-          </a:xfrm>
-          <a:prstGeom prst="rect">
-            <a:avLst/>
-          </a:prstGeom>
-        </p:spPr>
-        <p:txBody>
-          <a:bodyPr vert="horz" lIns="91440" tIns="45720" rIns="91440" bIns="45720" rtlCol="0" anchor="b"/>
-          <a:lstStyle>
-            <a:lvl1pPr algn="r">
-              <a:defRPr sz="1200"/>
-            </a:lvl1pPr>
-          </a:lstStyle>
-          <a:p>
-            <a:fld id="{CE5E9CC1-C706-0F49-92D6-E571CC5EEA8F}" type="slidenum">
-              <a:rPr lang="en-US"/>
-              <a:t>‹#›</a:t>
-            </a:fld>
-            <a:endParaRPr lang="en-US"/>
-          </a:p>
-        </p:txBody>
-      </p:sp>
     </p:spTree>
     <p:extLst>
       <p:ext uri="{BB962C8B-B14F-4D97-AF65-F5344CB8AC3E}">
-        <p14:creationId xmlns:p14="http://schemas.microsoft.com/office/powerpoint/2010/main" val="1024086991"/>
+        <p14:creationId xmlns:p14="http://schemas.microsoft.com/office/powerpoint/2010/main" val="3791110113"/>
       </p:ext>
     </p:extLst>
   </p:cSld>
@@ -523,10 +305,6 @@
           <a:bodyPr/>
           <a:lstStyle/>
           <a:p>
-            <a:r>
-              <a:rPr lang="en-US" dirty="0"/>
-              <a:t/>
-            </a:r>
             <a:endParaRPr lang="en-US" dirty="0"/>
           </a:p>
         </p:txBody>
@@ -611,10 +389,6 @@
           <a:bodyPr/>
           <a:lstStyle/>
           <a:p>
-            <a:r>
-              <a:rPr lang="en-US" dirty="0"/>
-              <a:t/>
-            </a:r>
             <a:endParaRPr lang="en-US" dirty="0"/>
           </a:p>
         </p:txBody>
@@ -699,10 +473,6 @@
           <a:bodyPr/>
           <a:lstStyle/>
           <a:p>
-            <a:r>
-              <a:rPr lang="en-US" dirty="0"/>
-              <a:t/>
-            </a:r>
             <a:endParaRPr lang="en-US" dirty="0"/>
           </a:p>
         </p:txBody>
@@ -787,10 +557,6 @@
           <a:bodyPr/>
           <a:lstStyle/>
           <a:p>
-            <a:r>
-              <a:rPr lang="en-US" dirty="0"/>
-              <a:t/>
-            </a:r>
             <a:endParaRPr lang="en-US" dirty="0"/>
           </a:p>
         </p:txBody>
@@ -875,10 +641,6 @@
           <a:bodyPr/>
           <a:lstStyle/>
           <a:p>
-            <a:r>
-              <a:rPr lang="en-US" dirty="0"/>
-              <a:t/>
-            </a:r>
             <a:endParaRPr lang="en-US" dirty="0"/>
           </a:p>
         </p:txBody>
@@ -963,10 +725,6 @@
           <a:bodyPr/>
           <a:lstStyle/>
           <a:p>
-            <a:r>
-              <a:rPr lang="en-US" dirty="0"/>
-              <a:t/>
-            </a:r>
             <a:endParaRPr lang="en-US" dirty="0"/>
           </a:p>
         </p:txBody>
@@ -1051,10 +809,6 @@
           <a:bodyPr/>
           <a:lstStyle/>
           <a:p>
-            <a:r>
-              <a:rPr lang="en-US" dirty="0"/>
-              <a:t/>
-            </a:r>
             <a:endParaRPr lang="en-US" dirty="0"/>
           </a:p>
         </p:txBody>
@@ -1139,10 +893,6 @@
           <a:bodyPr/>
           <a:lstStyle/>
           <a:p>
-            <a:r>
-              <a:rPr lang="en-US" dirty="0"/>
-              <a:t/>
-            </a:r>
             <a:endParaRPr lang="en-US" dirty="0"/>
           </a:p>
         </p:txBody>
@@ -1227,10 +977,6 @@
           <a:bodyPr/>
           <a:lstStyle/>
           <a:p>
-            <a:r>
-              <a:rPr lang="en-US" dirty="0"/>
-              <a:t/>
-            </a:r>
             <a:endParaRPr lang="en-US" dirty="0"/>
           </a:p>
         </p:txBody>
@@ -1315,10 +1061,6 @@
           <a:bodyPr/>
           <a:lstStyle/>
           <a:p>
-            <a:r>
-              <a:rPr lang="en-US" dirty="0"/>
-              <a:t/>
-            </a:r>
             <a:endParaRPr lang="en-US" dirty="0"/>
           </a:p>
         </p:txBody>
@@ -1397,6 +1139,7 @@
         <a:solidFill>
           <a:srgbClr val="000000"/>
         </a:solidFill>
+        <a:effectLst/>
       </p:bgPr>
     </p:bg>
     <p:spTree>
@@ -1453,32 +1196,6 @@
           <a:ln/>
         </p:spPr>
       </p:sp>
-      <p:pic>
-        <p:nvPicPr>
-          <p:cNvPr id="4" name="Image 0" descr="preencoded.png">
-            <a:hlinkClick r:id="rId2" tooltip=""/>
-          </p:cNvPr>
-          <p:cNvPicPr>
-            <a:picLocks noChangeAspect="1"/>
-          </p:cNvPicPr>
-          <p:nvPr/>
-        </p:nvPicPr>
-        <p:blipFill>
-          <a:blip r:embed="rId1"/>
-          <a:stretch>
-            <a:fillRect/>
-          </a:stretch>
-        </p:blipFill>
-        <p:spPr>
-          <a:xfrm>
-            <a:off x="11076875" y="6558991"/>
-            <a:ext cx="1071843" cy="256032"/>
-          </a:xfrm>
-          <a:prstGeom prst="rect">
-            <a:avLst/>
-          </a:prstGeom>
-        </p:spPr>
-      </p:pic>
     </p:spTree>
   </p:cSld>
   <p:clrMapOvr>
@@ -1490,6 +1207,11 @@
 <file path=ppt/slideMasters/slideMaster1.xml><?xml version="1.0" encoding="utf-8"?>
 <p:sldMaster xmlns:a="http://schemas.openxmlformats.org/drawingml/2006/main" xmlns:r="http://schemas.openxmlformats.org/officeDocument/2006/relationships" xmlns:p="http://schemas.openxmlformats.org/presentationml/2006/main">
   <p:cSld>
+    <p:bg>
+      <p:bgRef idx="1001">
+        <a:schemeClr val="bg1"/>
+      </p:bgRef>
+    </p:bg>
     <p:spTree>
       <p:nvGrpSpPr>
         <p:cNvPr id="1" name=""/>
@@ -1804,14 +1526,14 @@
       </p:sp>
       <p:pic>
         <p:nvPicPr>
-          <p:cNvPr id="3" name="Image 0" descr="preencoded.png">    </p:cNvPr>
+          <p:cNvPr id="3" name="Image 0" descr="preencoded.png"/>
           <p:cNvPicPr>
             <a:picLocks noChangeAspect="1"/>
           </p:cNvPicPr>
           <p:nvPr/>
         </p:nvPicPr>
         <p:blipFill>
-          <a:blip r:embed="rId1"/>
+          <a:blip r:embed="rId3"/>
           <a:stretch>
             <a:fillRect/>
           </a:stretch>
@@ -1849,7 +1571,7 @@
           </a:bodyPr>
           <a:lstStyle/>
           <a:p>
-            <a:pPr algn="l" indent="0" marL="0">
+            <a:pPr marL="0" indent="0" algn="l">
               <a:lnSpc>
                 <a:spcPct val="104000"/>
               </a:lnSpc>
@@ -1893,7 +1615,7 @@
           </a:bodyPr>
           <a:lstStyle/>
           <a:p>
-            <a:pPr algn="l" indent="0" marL="0">
+            <a:pPr marL="0" indent="0" algn="l">
               <a:lnSpc>
                 <a:spcPct val="133000"/>
               </a:lnSpc>
@@ -1910,7 +1632,102 @@
               </a:rPr>
               <a:t>Техника тест-дизайна для систем, где результат зависит от </a:t>
             </a:r>
-            <a:pPr algn="l" indent="0" marL="0">
+            <a:r>
+              <a:rPr lang="en-US" sz="1450" b="1" dirty="0">
+                <a:solidFill>
+                  <a:srgbClr val="000000"/>
+                </a:solidFill>
+                <a:latin typeface="Open Sans Bold" pitchFamily="34" charset="0"/>
+                <a:ea typeface="Open Sans Bold" pitchFamily="34" charset="-122"/>
+                <a:cs typeface="Open Sans Bold" pitchFamily="34" charset="-120"/>
+              </a:rPr>
+              <a:t>нескольких условий одновременно</a:t>
+            </a:r>
+            <a:r>
+              <a:rPr lang="en-US" sz="1450" dirty="0">
+                <a:solidFill>
+                  <a:srgbClr val="000000"/>
+                </a:solidFill>
+                <a:latin typeface="Open Sans" pitchFamily="34" charset="0"/>
+                <a:ea typeface="Open Sans" pitchFamily="34" charset="-122"/>
+                <a:cs typeface="Open Sans" pitchFamily="34" charset="-120"/>
+              </a:rPr>
+              <a:t>. Вместо анализа каждого условия по отдельности — все значимые комбинации в одной структуре.</a:t>
+            </a:r>
+            <a:endParaRPr lang="en-US" sz="1450" dirty="0"/>
+          </a:p>
+        </p:txBody>
+      </p:sp>
+      <p:sp>
+        <p:nvSpPr>
+          <p:cNvPr id="6" name="Shape 3"/>
+          <p:cNvSpPr/>
+          <p:nvPr/>
+        </p:nvSpPr>
+        <p:spPr>
+          <a:xfrm>
+            <a:off x="661475" y="4192091"/>
+            <a:ext cx="6296860" cy="1360785"/>
+          </a:xfrm>
+          <a:prstGeom prst="roundRect">
+            <a:avLst>
+              <a:gd name="adj" fmla="val 5834"/>
+            </a:avLst>
+          </a:prstGeom>
+          <a:solidFill>
+            <a:srgbClr val="D5F6F1"/>
+          </a:solidFill>
+          <a:ln/>
+        </p:spPr>
+      </p:sp>
+      <p:pic>
+        <p:nvPicPr>
+          <p:cNvPr id="7" name="Image 1" descr="preencoded.png"/>
+          <p:cNvPicPr>
+            <a:picLocks noChangeAspect="1"/>
+          </p:cNvPicPr>
+          <p:nvPr/>
+        </p:nvPicPr>
+        <p:blipFill>
+          <a:blip r:embed="rId4"/>
+          <a:stretch>
+            <a:fillRect/>
+          </a:stretch>
+        </p:blipFill>
+        <p:spPr>
+          <a:xfrm>
+            <a:off x="850482" y="4459784"/>
+            <a:ext cx="236234" cy="189012"/>
+          </a:xfrm>
+          <a:prstGeom prst="rect">
+            <a:avLst/>
+          </a:prstGeom>
+        </p:spPr>
+      </p:pic>
+      <p:sp>
+        <p:nvSpPr>
+          <p:cNvPr id="8" name="Text 4"/>
+          <p:cNvSpPr/>
+          <p:nvPr/>
+        </p:nvSpPr>
+        <p:spPr>
+          <a:xfrm>
+            <a:off x="1275723" y="4428331"/>
+            <a:ext cx="5493605" cy="907256"/>
+          </a:xfrm>
+          <a:prstGeom prst="rect">
+            <a:avLst/>
+          </a:prstGeom>
+          <a:noFill/>
+          <a:ln/>
+        </p:spPr>
+        <p:txBody>
+          <a:bodyPr wrap="square" lIns="0" tIns="0" rIns="0" bIns="0" rtlCol="0" anchor="t">
+            <a:normAutofit/>
+          </a:bodyPr>
+          <a:lstStyle/>
+          <a:p>
+            <a:pPr marL="0" indent="0" algn="l">
               <a:lnSpc>
                 <a:spcPct val="133000"/>
               </a:lnSpc>
@@ -1925,121 +1742,8 @@
                 <a:ea typeface="Open Sans Bold" pitchFamily="34" charset="-122"/>
                 <a:cs typeface="Open Sans Bold" pitchFamily="34" charset="-120"/>
               </a:rPr>
-              <a:t>нескольких условий одновременно</a:t>
-            </a:r>
-            <a:pPr algn="l" indent="0" marL="0">
-              <a:lnSpc>
-                <a:spcPct val="133000"/>
-              </a:lnSpc>
-              <a:buNone/>
-            </a:pPr>
-            <a:r>
-              <a:rPr lang="en-US" sz="1450" dirty="0">
-                <a:solidFill>
-                  <a:srgbClr val="000000"/>
-                </a:solidFill>
-                <a:latin typeface="Open Sans" pitchFamily="34" charset="0"/>
-                <a:ea typeface="Open Sans" pitchFamily="34" charset="-122"/>
-                <a:cs typeface="Open Sans" pitchFamily="34" charset="-120"/>
-              </a:rPr>
-              <a:t>. Вместо анализа каждого условия по отдельности — все значимые комбинации в одной структуре.</a:t>
-            </a:r>
-            <a:endParaRPr lang="en-US" sz="1450" dirty="0"/>
-          </a:p>
-        </p:txBody>
-      </p:sp>
-      <p:sp>
-        <p:nvSpPr>
-          <p:cNvPr id="6" name="Shape 3"/>
-          <p:cNvSpPr/>
-          <p:nvPr/>
-        </p:nvSpPr>
-        <p:spPr>
-          <a:xfrm>
-            <a:off x="661475" y="4192091"/>
-            <a:ext cx="6296860" cy="1360785"/>
-          </a:xfrm>
-          <a:prstGeom prst="roundRect">
-            <a:avLst>
-              <a:gd name="adj" fmla="val 5834"/>
-            </a:avLst>
-          </a:prstGeom>
-          <a:solidFill>
-            <a:srgbClr val="D5F6F1"/>
-          </a:solidFill>
-          <a:ln/>
-        </p:spPr>
-      </p:sp>
-      <p:pic>
-        <p:nvPicPr>
-          <p:cNvPr id="7" name="Image 1" descr="preencoded.png">    </p:cNvPr>
-          <p:cNvPicPr>
-            <a:picLocks noChangeAspect="1"/>
-          </p:cNvPicPr>
-          <p:nvPr/>
-        </p:nvPicPr>
-        <p:blipFill>
-          <a:blip r:embed="rId2"/>
-          <a:stretch>
-            <a:fillRect/>
-          </a:stretch>
-        </p:blipFill>
-        <p:spPr>
-          <a:xfrm>
-            <a:off x="850482" y="4459784"/>
-            <a:ext cx="236234" cy="189012"/>
-          </a:xfrm>
-          <a:prstGeom prst="rect">
-            <a:avLst/>
-          </a:prstGeom>
-        </p:spPr>
-      </p:pic>
-      <p:sp>
-        <p:nvSpPr>
-          <p:cNvPr id="8" name="Text 4"/>
-          <p:cNvSpPr/>
-          <p:nvPr/>
-        </p:nvSpPr>
-        <p:spPr>
-          <a:xfrm>
-            <a:off x="1275723" y="4428331"/>
-            <a:ext cx="5493605" cy="907256"/>
-          </a:xfrm>
-          <a:prstGeom prst="rect">
-            <a:avLst/>
-          </a:prstGeom>
-          <a:noFill/>
-          <a:ln/>
-        </p:spPr>
-        <p:txBody>
-          <a:bodyPr wrap="square" lIns="0" tIns="0" rIns="0" bIns="0" rtlCol="0" anchor="t">
-            <a:normAutofit/>
-          </a:bodyPr>
-          <a:lstStyle/>
-          <a:p>
-            <a:pPr algn="l" indent="0" marL="0">
-              <a:lnSpc>
-                <a:spcPct val="133000"/>
-              </a:lnSpc>
-              <a:buNone/>
-            </a:pPr>
-            <a:r>
-              <a:rPr lang="en-US" sz="1450" b="1" dirty="0">
-                <a:solidFill>
-                  <a:srgbClr val="000000"/>
-                </a:solidFill>
-                <a:latin typeface="Open Sans Bold" pitchFamily="34" charset="0"/>
-                <a:ea typeface="Open Sans Bold" pitchFamily="34" charset="-122"/>
-                <a:cs typeface="Open Sans Bold" pitchFamily="34" charset="-120"/>
-              </a:rPr>
               <a:t>Ключевая идея:</a:t>
             </a:r>
-            <a:pPr algn="l" indent="0" marL="0">
-              <a:lnSpc>
-                <a:spcPct val="133000"/>
-              </a:lnSpc>
-              <a:buNone/>
-            </a:pPr>
             <a:r>
               <a:rPr lang="en-US" sz="1450" dirty="0">
                 <a:solidFill>
@@ -2101,7 +1805,7 @@
           <a:bodyPr wrap="none" lIns="0" tIns="0" rIns="0" bIns="0" rtlCol="0" anchor="t"/>
           <a:lstStyle/>
           <a:p>
-            <a:pPr algn="l" indent="0" marL="0">
+            <a:pPr marL="0" indent="0" algn="l">
               <a:lnSpc>
                 <a:spcPct val="104000"/>
               </a:lnSpc>
@@ -2145,7 +1849,7 @@
           </a:bodyPr>
           <a:lstStyle/>
           <a:p>
-            <a:pPr algn="l" indent="0" marL="0">
+            <a:pPr marL="0" indent="0" algn="l">
               <a:lnSpc>
                 <a:spcPct val="133000"/>
               </a:lnSpc>
@@ -2162,12 +1866,6 @@
               </a:rPr>
               <a:t>Таблицы решений систематизируют условную логику и делают работу тестировщика </a:t>
             </a:r>
-            <a:pPr algn="l" indent="0" marL="0">
-              <a:lnSpc>
-                <a:spcPct val="133000"/>
-              </a:lnSpc>
-              <a:buNone/>
-            </a:pPr>
             <a:r>
               <a:rPr lang="en-US" sz="1450" b="1" dirty="0">
                 <a:solidFill>
@@ -2179,12 +1877,6 @@
               </a:rPr>
               <a:t>эффективнее и обоснованнее</a:t>
             </a:r>
-            <a:pPr algn="l" indent="0" marL="0">
-              <a:lnSpc>
-                <a:spcPct val="133000"/>
-              </a:lnSpc>
-              <a:buNone/>
-            </a:pPr>
             <a:r>
               <a:rPr lang="en-US" sz="1450" dirty="0">
                 <a:solidFill>
@@ -2202,17 +1894,17 @@
       </p:sp>
       <p:pic>
         <p:nvPicPr>
-          <p:cNvPr id="4" name="Image 0" descr="preencoded.png">    </p:cNvPr>
+          <p:cNvPr id="4" name="Image 0" descr="preencoded.png"/>
           <p:cNvPicPr>
             <a:picLocks noChangeAspect="1"/>
           </p:cNvPicPr>
           <p:nvPr/>
         </p:nvPicPr>
         <p:blipFill>
-          <a:blip r:embed="rId1">
+          <a:blip>
             <a:extLst>
               <a:ext uri="{96DAC541-7B7A-43D3-8B79-37D633B846F1}">
-                <asvg:svgBlip xmlns:asvg="http://schemas.microsoft.com/office/drawing/2016/SVG/main" r:embed="rId2"/>
+                <asvg:svgBlip xmlns:asvg="http://schemas.microsoft.com/office/drawing/2016/SVG/main" r:embed="rId3"/>
               </a:ext>
             </a:extLst>
           </a:blip>
@@ -2251,7 +1943,7 @@
           <a:bodyPr wrap="none" lIns="0" tIns="0" rIns="0" bIns="0" rtlCol="0" anchor="t"/>
           <a:lstStyle/>
           <a:p>
-            <a:pPr algn="l" indent="0" marL="0">
+            <a:pPr marL="0" indent="0" algn="l">
               <a:lnSpc>
                 <a:spcPct val="104000"/>
               </a:lnSpc>
@@ -2295,7 +1987,7 @@
           </a:bodyPr>
           <a:lstStyle/>
           <a:p>
-            <a:pPr algn="l" indent="0" marL="0">
+            <a:pPr marL="0" indent="0" algn="l">
               <a:lnSpc>
                 <a:spcPct val="133000"/>
               </a:lnSpc>
@@ -2318,17 +2010,17 @@
       </p:sp>
       <p:pic>
         <p:nvPicPr>
-          <p:cNvPr id="7" name="Image 1" descr="preencoded.png">    </p:cNvPr>
+          <p:cNvPr id="7" name="Image 1" descr="preencoded.png"/>
           <p:cNvPicPr>
             <a:picLocks noChangeAspect="1"/>
           </p:cNvPicPr>
           <p:nvPr/>
         </p:nvPicPr>
         <p:blipFill>
-          <a:blip r:embed="rId3">
+          <a:blip>
             <a:extLst>
               <a:ext uri="{96DAC541-7B7A-43D3-8B79-37D633B846F1}">
-                <asvg:svgBlip xmlns:asvg="http://schemas.microsoft.com/office/drawing/2016/SVG/main" r:embed="rId4"/>
+                <asvg:svgBlip xmlns:asvg="http://schemas.microsoft.com/office/drawing/2016/SVG/main" r:embed="rId3"/>
               </a:ext>
             </a:extLst>
           </a:blip>
@@ -2367,7 +2059,7 @@
           <a:bodyPr wrap="none" lIns="0" tIns="0" rIns="0" bIns="0" rtlCol="0" anchor="t"/>
           <a:lstStyle/>
           <a:p>
-            <a:pPr algn="l" indent="0" marL="0">
+            <a:pPr marL="0" indent="0" algn="l">
               <a:lnSpc>
                 <a:spcPct val="104000"/>
               </a:lnSpc>
@@ -2409,7 +2101,7 @@
           <a:bodyPr wrap="none" lIns="0" tIns="0" rIns="0" bIns="0" rtlCol="0" anchor="t"/>
           <a:lstStyle/>
           <a:p>
-            <a:pPr algn="l" indent="0" marL="0">
+            <a:pPr marL="0" indent="0" algn="l">
               <a:lnSpc>
                 <a:spcPct val="133000"/>
               </a:lnSpc>
@@ -2432,17 +2124,17 @@
       </p:sp>
       <p:pic>
         <p:nvPicPr>
-          <p:cNvPr id="10" name="Image 2" descr="preencoded.png">    </p:cNvPr>
+          <p:cNvPr id="10" name="Image 2" descr="preencoded.png"/>
           <p:cNvPicPr>
             <a:picLocks noChangeAspect="1"/>
           </p:cNvPicPr>
           <p:nvPr/>
         </p:nvPicPr>
         <p:blipFill>
-          <a:blip r:embed="rId5">
+          <a:blip>
             <a:extLst>
               <a:ext uri="{96DAC541-7B7A-43D3-8B79-37D633B846F1}">
-                <asvg:svgBlip xmlns:asvg="http://schemas.microsoft.com/office/drawing/2016/SVG/main" r:embed="rId6"/>
+                <asvg:svgBlip xmlns:asvg="http://schemas.microsoft.com/office/drawing/2016/SVG/main" r:embed="rId3"/>
               </a:ext>
             </a:extLst>
           </a:blip>
@@ -2481,7 +2173,7 @@
           <a:bodyPr wrap="none" lIns="0" tIns="0" rIns="0" bIns="0" rtlCol="0" anchor="t"/>
           <a:lstStyle/>
           <a:p>
-            <a:pPr algn="l" indent="0" marL="0">
+            <a:pPr marL="0" indent="0" algn="l">
               <a:lnSpc>
                 <a:spcPct val="104000"/>
               </a:lnSpc>
@@ -2523,7 +2215,7 @@
           <a:bodyPr wrap="none" lIns="0" tIns="0" rIns="0" bIns="0" rtlCol="0" anchor="t"/>
           <a:lstStyle/>
           <a:p>
-            <a:pPr algn="l" indent="0" marL="0">
+            <a:pPr marL="0" indent="0" algn="l">
               <a:lnSpc>
                 <a:spcPct val="133000"/>
               </a:lnSpc>
@@ -2546,17 +2238,17 @@
       </p:sp>
       <p:pic>
         <p:nvPicPr>
-          <p:cNvPr id="13" name="Image 3" descr="preencoded.png">    </p:cNvPr>
+          <p:cNvPr id="13" name="Image 3" descr="preencoded.png"/>
           <p:cNvPicPr>
             <a:picLocks noChangeAspect="1"/>
           </p:cNvPicPr>
           <p:nvPr/>
         </p:nvPicPr>
         <p:blipFill>
-          <a:blip r:embed="rId7">
+          <a:blip>
             <a:extLst>
               <a:ext uri="{96DAC541-7B7A-43D3-8B79-37D633B846F1}">
-                <asvg:svgBlip xmlns:asvg="http://schemas.microsoft.com/office/drawing/2016/SVG/main" r:embed="rId8"/>
+                <asvg:svgBlip xmlns:asvg="http://schemas.microsoft.com/office/drawing/2016/SVG/main" r:embed="rId3"/>
               </a:ext>
             </a:extLst>
           </a:blip>
@@ -2595,7 +2287,7 @@
           <a:bodyPr wrap="none" lIns="0" tIns="0" rIns="0" bIns="0" rtlCol="0" anchor="t"/>
           <a:lstStyle/>
           <a:p>
-            <a:pPr algn="l" indent="0" marL="0">
+            <a:pPr marL="0" indent="0" algn="l">
               <a:lnSpc>
                 <a:spcPct val="104000"/>
               </a:lnSpc>
@@ -2639,7 +2331,7 @@
           </a:bodyPr>
           <a:lstStyle/>
           <a:p>
-            <a:pPr algn="l" indent="0" marL="0">
+            <a:pPr marL="0" indent="0" algn="l">
               <a:lnSpc>
                 <a:spcPct val="133000"/>
               </a:lnSpc>
@@ -2707,14 +2399,14 @@
       </p:sp>
       <p:pic>
         <p:nvPicPr>
-          <p:cNvPr id="3" name="Image 0" descr="preencoded.png">    </p:cNvPr>
+          <p:cNvPr id="3" name="Image 0" descr="preencoded.png"/>
           <p:cNvPicPr>
             <a:picLocks noChangeAspect="1"/>
           </p:cNvPicPr>
           <p:nvPr/>
         </p:nvPicPr>
         <p:blipFill>
-          <a:blip r:embed="rId1"/>
+          <a:blip r:embed="rId3"/>
           <a:stretch>
             <a:fillRect/>
           </a:stretch>
@@ -2752,7 +2444,7 @@
           </a:bodyPr>
           <a:lstStyle/>
           <a:p>
-            <a:pPr algn="l" indent="0" marL="0">
+            <a:pPr marL="0" indent="0" algn="l">
               <a:lnSpc>
                 <a:spcPct val="104000"/>
               </a:lnSpc>
@@ -2821,7 +2513,7 @@
           <a:bodyPr wrap="none" lIns="0" tIns="0" rIns="0" bIns="0" rtlCol="0" anchor="t"/>
           <a:lstStyle/>
           <a:p>
-            <a:pPr algn="l" indent="0" marL="0">
+            <a:pPr marL="0" indent="0" algn="l">
               <a:lnSpc>
                 <a:spcPct val="104000"/>
               </a:lnSpc>
@@ -2863,7 +2555,7 @@
           <a:bodyPr wrap="none" lIns="0" tIns="0" rIns="0" bIns="0" rtlCol="0" anchor="t"/>
           <a:lstStyle/>
           <a:p>
-            <a:pPr algn="l" indent="0" marL="0">
+            <a:pPr marL="0" indent="0" algn="l">
               <a:lnSpc>
                 <a:spcPct val="127000"/>
               </a:lnSpc>
@@ -2932,7 +2624,7 @@
           <a:bodyPr wrap="none" lIns="0" tIns="0" rIns="0" bIns="0" rtlCol="0" anchor="t"/>
           <a:lstStyle/>
           <a:p>
-            <a:pPr algn="l" indent="0" marL="0">
+            <a:pPr marL="0" indent="0" algn="l">
               <a:lnSpc>
                 <a:spcPct val="104000"/>
               </a:lnSpc>
@@ -2974,7 +2666,7 @@
           <a:bodyPr wrap="none" lIns="0" tIns="0" rIns="0" bIns="0" rtlCol="0" anchor="t"/>
           <a:lstStyle/>
           <a:p>
-            <a:pPr algn="l" indent="0" marL="0">
+            <a:pPr marL="0" indent="0" algn="l">
               <a:lnSpc>
                 <a:spcPct val="127000"/>
               </a:lnSpc>
@@ -3043,7 +2735,7 @@
           <a:bodyPr wrap="none" lIns="0" tIns="0" rIns="0" bIns="0" rtlCol="0" anchor="t"/>
           <a:lstStyle/>
           <a:p>
-            <a:pPr algn="l" indent="0" marL="0">
+            <a:pPr marL="0" indent="0" algn="l">
               <a:lnSpc>
                 <a:spcPct val="104000"/>
               </a:lnSpc>
@@ -3085,7 +2777,7 @@
           <a:bodyPr wrap="none" lIns="0" tIns="0" rIns="0" bIns="0" rtlCol="0" anchor="t"/>
           <a:lstStyle/>
           <a:p>
-            <a:pPr algn="l" indent="0" marL="0">
+            <a:pPr marL="0" indent="0" algn="l">
               <a:lnSpc>
                 <a:spcPct val="127000"/>
               </a:lnSpc>
@@ -3154,7 +2846,7 @@
           <a:bodyPr wrap="none" lIns="0" tIns="0" rIns="0" bIns="0" rtlCol="0" anchor="t"/>
           <a:lstStyle/>
           <a:p>
-            <a:pPr algn="l" indent="0" marL="0">
+            <a:pPr marL="0" indent="0" algn="l">
               <a:lnSpc>
                 <a:spcPct val="104000"/>
               </a:lnSpc>
@@ -3196,7 +2888,7 @@
           <a:bodyPr wrap="none" lIns="0" tIns="0" rIns="0" bIns="0" rtlCol="0" anchor="t"/>
           <a:lstStyle/>
           <a:p>
-            <a:pPr algn="l" indent="0" marL="0">
+            <a:pPr marL="0" indent="0" algn="l">
               <a:lnSpc>
                 <a:spcPct val="127000"/>
               </a:lnSpc>
@@ -3244,14 +2936,14 @@
       </p:grpSpPr>
       <p:pic>
         <p:nvPicPr>
-          <p:cNvPr id="2" name="Image 0" descr="preencoded.png">    </p:cNvPr>
+          <p:cNvPr id="2" name="Image 0" descr="preencoded.png"/>
           <p:cNvPicPr>
             <a:picLocks noChangeAspect="1"/>
           </p:cNvPicPr>
           <p:nvPr/>
         </p:nvPicPr>
         <p:blipFill>
-          <a:blip r:embed="rId1"/>
+          <a:blip r:embed="rId3"/>
           <a:stretch>
             <a:fillRect/>
           </a:stretch>
@@ -3289,7 +2981,7 @@
           </a:bodyPr>
           <a:lstStyle/>
           <a:p>
-            <a:pPr algn="l" indent="0" marL="0">
+            <a:pPr marL="0" indent="0" algn="l">
               <a:lnSpc>
                 <a:spcPct val="104000"/>
               </a:lnSpc>
@@ -3333,7 +3025,7 @@
           </a:bodyPr>
           <a:lstStyle/>
           <a:p>
-            <a:pPr algn="l" indent="0" marL="0">
+            <a:pPr marL="0" indent="0" algn="l">
               <a:lnSpc>
                 <a:spcPct val="133000"/>
               </a:lnSpc>
@@ -3350,14 +3042,74 @@
               </a:rPr>
               <a:t>Факторы, которые влияют на результат: признаки, состояния, значения параметров. Каждое условие должно иметь </a:t>
             </a:r>
-            <a:pPr algn="l" indent="0" marL="0">
+            <a:r>
+              <a:rPr lang="en-US" sz="1450" b="1" dirty="0">
+                <a:solidFill>
+                  <a:srgbClr val="000000"/>
+                </a:solidFill>
+                <a:latin typeface="Open Sans Bold" pitchFamily="34" charset="0"/>
+                <a:ea typeface="Open Sans Bold" pitchFamily="34" charset="-122"/>
+                <a:cs typeface="Open Sans Bold" pitchFamily="34" charset="-120"/>
+              </a:rPr>
+              <a:t>чёткие возможные состояния</a:t>
+            </a:r>
+            <a:r>
+              <a:rPr lang="en-US" sz="1450" dirty="0">
+                <a:solidFill>
+                  <a:srgbClr val="000000"/>
+                </a:solidFill>
+                <a:latin typeface="Open Sans" pitchFamily="34" charset="0"/>
+                <a:ea typeface="Open Sans" pitchFamily="34" charset="-122"/>
+                <a:cs typeface="Open Sans" pitchFamily="34" charset="-120"/>
+              </a:rPr>
+              <a:t>.</a:t>
+            </a:r>
+            <a:endParaRPr lang="en-US" sz="1450" dirty="0"/>
+          </a:p>
+        </p:txBody>
+      </p:sp>
+      <p:sp>
+        <p:nvSpPr>
+          <p:cNvPr id="5" name="Text 2"/>
+          <p:cNvSpPr/>
+          <p:nvPr/>
+        </p:nvSpPr>
+        <p:spPr>
+          <a:xfrm>
+            <a:off x="4633201" y="3804345"/>
+            <a:ext cx="6903269" cy="483791"/>
+          </a:xfrm>
+          <a:prstGeom prst="rect">
+            <a:avLst/>
+          </a:prstGeom>
+          <a:noFill/>
+          <a:ln/>
+        </p:spPr>
+        <p:txBody>
+          <a:bodyPr wrap="square" lIns="0" tIns="0" rIns="0" bIns="0" rtlCol="0" anchor="t">
+            <a:normAutofit/>
+          </a:bodyPr>
+          <a:lstStyle/>
+          <a:p>
+            <a:pPr marL="0" indent="0" algn="l">
               <a:lnSpc>
                 <a:spcPct val="133000"/>
               </a:lnSpc>
               <a:buNone/>
             </a:pPr>
             <a:r>
-              <a:rPr lang="en-US" sz="1450" b="1" dirty="0">
+              <a:rPr lang="en-US" sz="1150" dirty="0">
+                <a:solidFill>
+                  <a:srgbClr val="000000"/>
+                </a:solidFill>
+                <a:latin typeface="Open Sans" pitchFamily="34" charset="0"/>
+                <a:ea typeface="Open Sans" pitchFamily="34" charset="-122"/>
+                <a:cs typeface="Open Sans" pitchFamily="34" charset="-120"/>
+              </a:rPr>
+              <a:t>Включайте только условия, которые </a:t>
+            </a:r>
+            <a:r>
+              <a:rPr lang="en-US" sz="1150" b="1" dirty="0">
                 <a:solidFill>
                   <a:srgbClr val="000000"/>
                 </a:solidFill>
@@ -3365,16 +3117,10 @@
                 <a:ea typeface="Open Sans Bold" pitchFamily="34" charset="-122"/>
                 <a:cs typeface="Open Sans Bold" pitchFamily="34" charset="-120"/>
               </a:rPr>
-              <a:t>чёткие возможные состояния</a:t>
-            </a:r>
-            <a:pPr algn="l" indent="0" marL="0">
-              <a:lnSpc>
-                <a:spcPct val="133000"/>
-              </a:lnSpc>
-              <a:buNone/>
-            </a:pPr>
-            <a:r>
-              <a:rPr lang="en-US" sz="1450" dirty="0">
+              <a:t>реально влияют</a:t>
+            </a:r>
+            <a:r>
+              <a:rPr lang="en-US" sz="1150" dirty="0">
                 <a:solidFill>
                   <a:srgbClr val="000000"/>
                 </a:solidFill>
@@ -3382,84 +3128,6 @@
                 <a:ea typeface="Open Sans" pitchFamily="34" charset="-122"/>
                 <a:cs typeface="Open Sans" pitchFamily="34" charset="-120"/>
               </a:rPr>
-              <a:t>.</a:t>
-            </a:r>
-            <a:endParaRPr lang="en-US" sz="1450" dirty="0"/>
-          </a:p>
-        </p:txBody>
-      </p:sp>
-      <p:sp>
-        <p:nvSpPr>
-          <p:cNvPr id="5" name="Text 2"/>
-          <p:cNvSpPr/>
-          <p:nvPr/>
-        </p:nvSpPr>
-        <p:spPr>
-          <a:xfrm>
-            <a:off x="4633201" y="3804345"/>
-            <a:ext cx="6903269" cy="483791"/>
-          </a:xfrm>
-          <a:prstGeom prst="rect">
-            <a:avLst/>
-          </a:prstGeom>
-          <a:noFill/>
-          <a:ln/>
-        </p:spPr>
-        <p:txBody>
-          <a:bodyPr wrap="square" lIns="0" tIns="0" rIns="0" bIns="0" rtlCol="0" anchor="t">
-            <a:normAutofit/>
-          </a:bodyPr>
-          <a:lstStyle/>
-          <a:p>
-            <a:pPr algn="l" indent="0" marL="0">
-              <a:lnSpc>
-                <a:spcPct val="133000"/>
-              </a:lnSpc>
-              <a:buNone/>
-            </a:pPr>
-            <a:r>
-              <a:rPr lang="en-US" sz="1150" dirty="0">
-                <a:solidFill>
-                  <a:srgbClr val="000000"/>
-                </a:solidFill>
-                <a:latin typeface="Open Sans" pitchFamily="34" charset="0"/>
-                <a:ea typeface="Open Sans" pitchFamily="34" charset="-122"/>
-                <a:cs typeface="Open Sans" pitchFamily="34" charset="-120"/>
-              </a:rPr>
-              <a:t>Включайте только условия, которые </a:t>
-            </a:r>
-            <a:pPr algn="l" indent="0" marL="0">
-              <a:lnSpc>
-                <a:spcPct val="133000"/>
-              </a:lnSpc>
-              <a:buNone/>
-            </a:pPr>
-            <a:r>
-              <a:rPr lang="en-US" sz="1150" b="1" dirty="0">
-                <a:solidFill>
-                  <a:srgbClr val="000000"/>
-                </a:solidFill>
-                <a:latin typeface="Open Sans Bold" pitchFamily="34" charset="0"/>
-                <a:ea typeface="Open Sans Bold" pitchFamily="34" charset="-122"/>
-                <a:cs typeface="Open Sans Bold" pitchFamily="34" charset="-120"/>
-              </a:rPr>
-              <a:t>реально влияют</a:t>
-            </a:r>
-            <a:pPr algn="l" indent="0" marL="0">
-              <a:lnSpc>
-                <a:spcPct val="133000"/>
-              </a:lnSpc>
-              <a:buNone/>
-            </a:pPr>
-            <a:r>
-              <a:rPr lang="en-US" sz="1150" dirty="0">
-                <a:solidFill>
-                  <a:srgbClr val="000000"/>
-                </a:solidFill>
-                <a:latin typeface="Open Sans" pitchFamily="34" charset="0"/>
-                <a:ea typeface="Open Sans" pitchFamily="34" charset="-122"/>
-                <a:cs typeface="Open Sans" pitchFamily="34" charset="-120"/>
-              </a:rPr>
               <a:t> на решение — лишние параметры усложняют таблицу без пользы.</a:t>
             </a:r>
             <a:endParaRPr lang="en-US" sz="1150" dirty="0"/>
@@ -3468,17 +3136,17 @@
       </p:sp>
       <p:pic>
         <p:nvPicPr>
-          <p:cNvPr id="6" name="Image 1" descr="preencoded.png">    </p:cNvPr>
+          <p:cNvPr id="6" name="Image 1" descr="preencoded.png"/>
           <p:cNvPicPr>
             <a:picLocks noChangeAspect="1"/>
           </p:cNvPicPr>
           <p:nvPr/>
         </p:nvPicPr>
         <p:blipFill>
-          <a:blip r:embed="rId2">
+          <a:blip>
             <a:extLst>
               <a:ext uri="{96DAC541-7B7A-43D3-8B79-37D633B846F1}">
-                <asvg:svgBlip xmlns:asvg="http://schemas.microsoft.com/office/drawing/2016/SVG/main" r:embed="rId3"/>
+                <asvg:svgBlip xmlns:asvg="http://schemas.microsoft.com/office/drawing/2016/SVG/main" r:embed="rId4"/>
               </a:ext>
             </a:extLst>
           </a:blip>
@@ -3519,7 +3187,7 @@
           </a:bodyPr>
           <a:lstStyle/>
           <a:p>
-            <a:pPr algn="l" indent="0" marL="0">
+            <a:pPr marL="0" indent="0" algn="l">
               <a:lnSpc>
                 <a:spcPct val="104000"/>
               </a:lnSpc>
@@ -3542,17 +3210,17 @@
       </p:sp>
       <p:pic>
         <p:nvPicPr>
-          <p:cNvPr id="8" name="Image 2" descr="preencoded.png">    </p:cNvPr>
+          <p:cNvPr id="8" name="Image 2" descr="preencoded.png"/>
           <p:cNvPicPr>
             <a:picLocks noChangeAspect="1"/>
           </p:cNvPicPr>
           <p:nvPr/>
         </p:nvPicPr>
         <p:blipFill>
-          <a:blip r:embed="rId4">
+          <a:blip>
             <a:extLst>
               <a:ext uri="{96DAC541-7B7A-43D3-8B79-37D633B846F1}">
-                <asvg:svgBlip xmlns:asvg="http://schemas.microsoft.com/office/drawing/2016/SVG/main" r:embed="rId5"/>
+                <asvg:svgBlip xmlns:asvg="http://schemas.microsoft.com/office/drawing/2016/SVG/main" r:embed="rId4"/>
               </a:ext>
             </a:extLst>
           </a:blip>
@@ -3593,7 +3261,7 @@
           </a:bodyPr>
           <a:lstStyle/>
           <a:p>
-            <a:pPr algn="l" indent="0" marL="0">
+            <a:pPr marL="0" indent="0" algn="l">
               <a:lnSpc>
                 <a:spcPct val="104000"/>
               </a:lnSpc>
@@ -3616,17 +3284,17 @@
       </p:sp>
       <p:pic>
         <p:nvPicPr>
-          <p:cNvPr id="10" name="Image 3" descr="preencoded.png">    </p:cNvPr>
+          <p:cNvPr id="10" name="Image 3" descr="preencoded.png"/>
           <p:cNvPicPr>
             <a:picLocks noChangeAspect="1"/>
           </p:cNvPicPr>
           <p:nvPr/>
         </p:nvPicPr>
         <p:blipFill>
-          <a:blip r:embed="rId6">
+          <a:blip>
             <a:extLst>
               <a:ext uri="{96DAC541-7B7A-43D3-8B79-37D633B846F1}">
-                <asvg:svgBlip xmlns:asvg="http://schemas.microsoft.com/office/drawing/2016/SVG/main" r:embed="rId7"/>
+                <asvg:svgBlip xmlns:asvg="http://schemas.microsoft.com/office/drawing/2016/SVG/main" r:embed="rId4"/>
               </a:ext>
             </a:extLst>
           </a:blip>
@@ -3665,7 +3333,7 @@
           <a:bodyPr wrap="none" lIns="0" tIns="0" rIns="0" bIns="0" rtlCol="0" anchor="t"/>
           <a:lstStyle/>
           <a:p>
-            <a:pPr algn="l" indent="0" marL="0">
+            <a:pPr marL="0" indent="0" algn="l">
               <a:lnSpc>
                 <a:spcPct val="104000"/>
               </a:lnSpc>
@@ -3688,17 +3356,17 @@
       </p:sp>
       <p:pic>
         <p:nvPicPr>
-          <p:cNvPr id="12" name="Image 4" descr="preencoded.png">    </p:cNvPr>
+          <p:cNvPr id="12" name="Image 4" descr="preencoded.png"/>
           <p:cNvPicPr>
             <a:picLocks noChangeAspect="1"/>
           </p:cNvPicPr>
           <p:nvPr/>
         </p:nvPicPr>
         <p:blipFill>
-          <a:blip r:embed="rId8">
+          <a:blip>
             <a:extLst>
               <a:ext uri="{96DAC541-7B7A-43D3-8B79-37D633B846F1}">
-                <asvg:svgBlip xmlns:asvg="http://schemas.microsoft.com/office/drawing/2016/SVG/main" r:embed="rId9"/>
+                <asvg:svgBlip xmlns:asvg="http://schemas.microsoft.com/office/drawing/2016/SVG/main" r:embed="rId4"/>
               </a:ext>
             </a:extLst>
           </a:blip>
@@ -3739,7 +3407,7 @@
           </a:bodyPr>
           <a:lstStyle/>
           <a:p>
-            <a:pPr algn="l" indent="0" marL="0">
+            <a:pPr marL="0" indent="0" algn="l">
               <a:lnSpc>
                 <a:spcPct val="104000"/>
               </a:lnSpc>
@@ -3806,7 +3474,7 @@
           <a:bodyPr wrap="none" lIns="0" tIns="0" rIns="0" bIns="0" rtlCol="0" anchor="t"/>
           <a:lstStyle/>
           <a:p>
-            <a:pPr algn="l" indent="0" marL="0">
+            <a:pPr marL="0" indent="0" algn="l">
               <a:lnSpc>
                 <a:spcPct val="104000"/>
               </a:lnSpc>
@@ -3850,7 +3518,7 @@
           </a:bodyPr>
           <a:lstStyle/>
           <a:p>
-            <a:pPr algn="l" indent="0" marL="0">
+            <a:pPr marL="0" indent="0" algn="l">
               <a:lnSpc>
                 <a:spcPct val="133000"/>
               </a:lnSpc>
@@ -3867,12 +3535,6 @@
               </a:rPr>
               <a:t>Ожидаемые результаты системы при конкретной комбинации условий. Должны быть сформулированы </a:t>
             </a:r>
-            <a:pPr algn="l" indent="0" marL="0">
-              <a:lnSpc>
-                <a:spcPct val="133000"/>
-              </a:lnSpc>
-              <a:buNone/>
-            </a:pPr>
             <a:r>
               <a:rPr lang="en-US" sz="1450" b="1" dirty="0">
                 <a:solidFill>
@@ -3884,12 +3546,6 @@
               </a:rPr>
               <a:t>конкретно и проверяемо</a:t>
             </a:r>
-            <a:pPr algn="l" indent="0" marL="0">
-              <a:lnSpc>
-                <a:spcPct val="133000"/>
-              </a:lnSpc>
-              <a:buNone/>
-            </a:pPr>
             <a:r>
               <a:rPr lang="en-US" sz="1450" dirty="0">
                 <a:solidFill>
@@ -3907,17 +3563,17 @@
       </p:sp>
       <p:pic>
         <p:nvPicPr>
-          <p:cNvPr id="4" name="Image 0" descr="preencoded.png">    </p:cNvPr>
+          <p:cNvPr id="4" name="Image 0" descr="preencoded.png"/>
           <p:cNvPicPr>
             <a:picLocks noChangeAspect="1"/>
           </p:cNvPicPr>
           <p:nvPr/>
         </p:nvPicPr>
         <p:blipFill>
-          <a:blip r:embed="rId1">
+          <a:blip>
             <a:extLst>
               <a:ext uri="{96DAC541-7B7A-43D3-8B79-37D633B846F1}">
-                <asvg:svgBlip xmlns:asvg="http://schemas.microsoft.com/office/drawing/2016/SVG/main" r:embed="rId2"/>
+                <asvg:svgBlip xmlns:asvg="http://schemas.microsoft.com/office/drawing/2016/SVG/main" r:embed="rId3"/>
               </a:ext>
             </a:extLst>
           </a:blip>
@@ -3956,7 +3612,7 @@
           <a:bodyPr wrap="none" lIns="0" tIns="0" rIns="0" bIns="0" rtlCol="0" anchor="t"/>
           <a:lstStyle/>
           <a:p>
-            <a:pPr algn="l" indent="0" marL="0">
+            <a:pPr marL="0" indent="0" algn="l">
               <a:lnSpc>
                 <a:spcPct val="104000"/>
               </a:lnSpc>
@@ -3998,7 +3654,7 @@
           <a:bodyPr wrap="none" lIns="0" tIns="0" rIns="0" bIns="0" rtlCol="0" anchor="t"/>
           <a:lstStyle/>
           <a:p>
-            <a:pPr algn="l" indent="0" marL="0">
+            <a:pPr marL="0" indent="0" algn="l">
               <a:lnSpc>
                 <a:spcPct val="133000"/>
               </a:lnSpc>
@@ -4021,14 +3677,14 @@
       </p:sp>
       <p:pic>
         <p:nvPicPr>
-          <p:cNvPr id="7" name="Image 1" descr="preencoded.png">    </p:cNvPr>
+          <p:cNvPr id="7" name="Image 1" descr="preencoded.png"/>
           <p:cNvPicPr>
             <a:picLocks noChangeAspect="1"/>
           </p:cNvPicPr>
           <p:nvPr/>
         </p:nvPicPr>
         <p:blipFill>
-          <a:blip r:embed="rId3">
+          <a:blip>
             <a:extLst>
               <a:ext uri="{96DAC541-7B7A-43D3-8B79-37D633B846F1}">
                 <asvg:svgBlip xmlns:asvg="http://schemas.microsoft.com/office/drawing/2016/SVG/main" r:embed="rId4"/>
@@ -4070,7 +3726,7 @@
           <a:bodyPr wrap="none" lIns="0" tIns="0" rIns="0" bIns="0" rtlCol="0" anchor="t"/>
           <a:lstStyle/>
           <a:p>
-            <a:pPr algn="l" indent="0" marL="0">
+            <a:pPr marL="0" indent="0" algn="l">
               <a:lnSpc>
                 <a:spcPct val="104000"/>
               </a:lnSpc>
@@ -4112,7 +3768,7 @@
           <a:bodyPr wrap="none" lIns="0" tIns="0" rIns="0" bIns="0" rtlCol="0" anchor="t"/>
           <a:lstStyle/>
           <a:p>
-            <a:pPr algn="l" indent="0" marL="0">
+            <a:pPr marL="0" indent="0" algn="l">
               <a:lnSpc>
                 <a:spcPct val="133000"/>
               </a:lnSpc>
@@ -4135,14 +3791,128 @@
       </p:sp>
       <p:pic>
         <p:nvPicPr>
-          <p:cNvPr id="10" name="Image 2" descr="preencoded.png">    </p:cNvPr>
+          <p:cNvPr id="10" name="Image 2" descr="preencoded.png"/>
           <p:cNvPicPr>
             <a:picLocks noChangeAspect="1"/>
           </p:cNvPicPr>
           <p:nvPr/>
         </p:nvPicPr>
         <p:blipFill>
-          <a:blip r:embed="rId5">
+          <a:blip>
+            <a:extLst>
+              <a:ext uri="{96DAC541-7B7A-43D3-8B79-37D633B846F1}">
+                <asvg:svgBlip xmlns:asvg="http://schemas.microsoft.com/office/drawing/2016/SVG/main" r:embed="rId5"/>
+              </a:ext>
+            </a:extLst>
+          </a:blip>
+          <a:stretch>
+            <a:fillRect/>
+          </a:stretch>
+        </p:blipFill>
+        <p:spPr>
+          <a:xfrm>
+            <a:off x="661475" y="4359870"/>
+            <a:ext cx="472468" cy="472480"/>
+          </a:xfrm>
+          <a:prstGeom prst="rect">
+            <a:avLst/>
+          </a:prstGeom>
+        </p:spPr>
+      </p:pic>
+      <p:sp>
+        <p:nvSpPr>
+          <p:cNvPr id="11" name="Text 6"/>
+          <p:cNvSpPr/>
+          <p:nvPr/>
+        </p:nvSpPr>
+        <p:spPr>
+          <a:xfrm>
+            <a:off x="1370177" y="4359870"/>
+            <a:ext cx="4607504" cy="295275"/>
+          </a:xfrm>
+          <a:prstGeom prst="rect">
+            <a:avLst/>
+          </a:prstGeom>
+          <a:noFill/>
+          <a:ln/>
+        </p:spPr>
+        <p:txBody>
+          <a:bodyPr wrap="none" lIns="0" tIns="0" rIns="0" bIns="0" rtlCol="0" anchor="t"/>
+          <a:lstStyle/>
+          <a:p>
+            <a:pPr marL="0" indent="0" algn="l">
+              <a:lnSpc>
+                <a:spcPct val="104000"/>
+              </a:lnSpc>
+              <a:buNone/>
+            </a:pPr>
+            <a:r>
+              <a:rPr lang="en-US" sz="1850" b="1" dirty="0">
+                <a:solidFill>
+                  <a:srgbClr val="000000"/>
+                </a:solidFill>
+                <a:latin typeface="Montserrat Bold" pitchFamily="34" charset="0"/>
+                <a:ea typeface="Montserrat Bold" pitchFamily="34" charset="-122"/>
+                <a:cs typeface="Montserrat Bold" pitchFamily="34" charset="-120"/>
+              </a:rPr>
+              <a:t>Уведомление</a:t>
+            </a:r>
+            <a:endParaRPr lang="en-US" sz="1850" dirty="0"/>
+          </a:p>
+        </p:txBody>
+      </p:sp>
+      <p:sp>
+        <p:nvSpPr>
+          <p:cNvPr id="12" name="Text 7"/>
+          <p:cNvSpPr/>
+          <p:nvPr/>
+        </p:nvSpPr>
+        <p:spPr>
+          <a:xfrm>
+            <a:off x="1370177" y="4768552"/>
+            <a:ext cx="4607504" cy="302419"/>
+          </a:xfrm>
+          <a:prstGeom prst="rect">
+            <a:avLst/>
+          </a:prstGeom>
+          <a:noFill/>
+          <a:ln/>
+        </p:spPr>
+        <p:txBody>
+          <a:bodyPr wrap="none" lIns="0" tIns="0" rIns="0" bIns="0" rtlCol="0" anchor="t"/>
+          <a:lstStyle/>
+          <a:p>
+            <a:pPr marL="0" indent="0" algn="l">
+              <a:lnSpc>
+                <a:spcPct val="133000"/>
+              </a:lnSpc>
+              <a:buNone/>
+            </a:pPr>
+            <a:r>
+              <a:rPr lang="en-US" sz="1450" dirty="0">
+                <a:solidFill>
+                  <a:srgbClr val="000000"/>
+                </a:solidFill>
+                <a:latin typeface="Open Sans" pitchFamily="34" charset="0"/>
+                <a:ea typeface="Open Sans" pitchFamily="34" charset="-122"/>
+                <a:cs typeface="Open Sans" pitchFamily="34" charset="-120"/>
+              </a:rPr>
+              <a:t>Система отправляет сообщение пользователю</a:t>
+            </a:r>
+            <a:endParaRPr lang="en-US" sz="1450" dirty="0"/>
+          </a:p>
+        </p:txBody>
+      </p:sp>
+      <p:pic>
+        <p:nvPicPr>
+          <p:cNvPr id="13" name="Image 3" descr="preencoded.png"/>
+          <p:cNvPicPr>
+            <a:picLocks noChangeAspect="1"/>
+          </p:cNvPicPr>
+          <p:nvPr/>
+        </p:nvPicPr>
+        <p:blipFill>
+          <a:blip>
             <a:extLst>
               <a:ext uri="{96DAC541-7B7A-43D3-8B79-37D633B846F1}">
                 <asvg:svgBlip xmlns:asvg="http://schemas.microsoft.com/office/drawing/2016/SVG/main" r:embed="rId6"/>
@@ -4155,7 +3925,7 @@
         </p:blipFill>
         <p:spPr>
           <a:xfrm>
-            <a:off x="661475" y="4359870"/>
+            <a:off x="6213915" y="4359870"/>
             <a:ext cx="472468" cy="472480"/>
           </a:xfrm>
           <a:prstGeom prst="rect">
@@ -4165,14 +3935,14 @@
       </p:pic>
       <p:sp>
         <p:nvSpPr>
-          <p:cNvPr id="11" name="Text 6"/>
-          <p:cNvSpPr/>
-          <p:nvPr/>
-        </p:nvSpPr>
-        <p:spPr>
-          <a:xfrm>
-            <a:off x="1370177" y="4359870"/>
-            <a:ext cx="4607504" cy="295275"/>
+          <p:cNvPr id="14" name="Text 8"/>
+          <p:cNvSpPr/>
+          <p:nvPr/>
+        </p:nvSpPr>
+        <p:spPr>
+          <a:xfrm>
+            <a:off x="6922617" y="4359870"/>
+            <a:ext cx="4607603" cy="295275"/>
           </a:xfrm>
           <a:prstGeom prst="rect">
             <a:avLst/>
@@ -4184,7 +3954,7 @@
           <a:bodyPr wrap="none" lIns="0" tIns="0" rIns="0" bIns="0" rtlCol="0" anchor="t"/>
           <a:lstStyle/>
           <a:p>
-            <a:pPr algn="l" indent="0" marL="0">
+            <a:pPr marL="0" indent="0" algn="l">
               <a:lnSpc>
                 <a:spcPct val="104000"/>
               </a:lnSpc>
@@ -4199,120 +3969,6 @@
                 <a:ea typeface="Montserrat Bold" pitchFamily="34" charset="-122"/>
                 <a:cs typeface="Montserrat Bold" pitchFamily="34" charset="-120"/>
               </a:rPr>
-              <a:t>Уведомление</a:t>
-            </a:r>
-            <a:endParaRPr lang="en-US" sz="1850" dirty="0"/>
-          </a:p>
-        </p:txBody>
-      </p:sp>
-      <p:sp>
-        <p:nvSpPr>
-          <p:cNvPr id="12" name="Text 7"/>
-          <p:cNvSpPr/>
-          <p:nvPr/>
-        </p:nvSpPr>
-        <p:spPr>
-          <a:xfrm>
-            <a:off x="1370177" y="4768552"/>
-            <a:ext cx="4607504" cy="302419"/>
-          </a:xfrm>
-          <a:prstGeom prst="rect">
-            <a:avLst/>
-          </a:prstGeom>
-          <a:noFill/>
-          <a:ln/>
-        </p:spPr>
-        <p:txBody>
-          <a:bodyPr wrap="none" lIns="0" tIns="0" rIns="0" bIns="0" rtlCol="0" anchor="t"/>
-          <a:lstStyle/>
-          <a:p>
-            <a:pPr algn="l" indent="0" marL="0">
-              <a:lnSpc>
-                <a:spcPct val="133000"/>
-              </a:lnSpc>
-              <a:buNone/>
-            </a:pPr>
-            <a:r>
-              <a:rPr lang="en-US" sz="1450" dirty="0">
-                <a:solidFill>
-                  <a:srgbClr val="000000"/>
-                </a:solidFill>
-                <a:latin typeface="Open Sans" pitchFamily="34" charset="0"/>
-                <a:ea typeface="Open Sans" pitchFamily="34" charset="-122"/>
-                <a:cs typeface="Open Sans" pitchFamily="34" charset="-120"/>
-              </a:rPr>
-              <a:t>Система отправляет сообщение пользователю</a:t>
-            </a:r>
-            <a:endParaRPr lang="en-US" sz="1450" dirty="0"/>
-          </a:p>
-        </p:txBody>
-      </p:sp>
-      <p:pic>
-        <p:nvPicPr>
-          <p:cNvPr id="13" name="Image 3" descr="preencoded.png">    </p:cNvPr>
-          <p:cNvPicPr>
-            <a:picLocks noChangeAspect="1"/>
-          </p:cNvPicPr>
-          <p:nvPr/>
-        </p:nvPicPr>
-        <p:blipFill>
-          <a:blip r:embed="rId7">
-            <a:extLst>
-              <a:ext uri="{96DAC541-7B7A-43D3-8B79-37D633B846F1}">
-                <asvg:svgBlip xmlns:asvg="http://schemas.microsoft.com/office/drawing/2016/SVG/main" r:embed="rId8"/>
-              </a:ext>
-            </a:extLst>
-          </a:blip>
-          <a:stretch>
-            <a:fillRect/>
-          </a:stretch>
-        </p:blipFill>
-        <p:spPr>
-          <a:xfrm>
-            <a:off x="6213915" y="4359870"/>
-            <a:ext cx="472468" cy="472480"/>
-          </a:xfrm>
-          <a:prstGeom prst="rect">
-            <a:avLst/>
-          </a:prstGeom>
-        </p:spPr>
-      </p:pic>
-      <p:sp>
-        <p:nvSpPr>
-          <p:cNvPr id="14" name="Text 8"/>
-          <p:cNvSpPr/>
-          <p:nvPr/>
-        </p:nvSpPr>
-        <p:spPr>
-          <a:xfrm>
-            <a:off x="6922617" y="4359870"/>
-            <a:ext cx="4607603" cy="295275"/>
-          </a:xfrm>
-          <a:prstGeom prst="rect">
-            <a:avLst/>
-          </a:prstGeom>
-          <a:noFill/>
-          <a:ln/>
-        </p:spPr>
-        <p:txBody>
-          <a:bodyPr wrap="none" lIns="0" tIns="0" rIns="0" bIns="0" rtlCol="0" anchor="t"/>
-          <a:lstStyle/>
-          <a:p>
-            <a:pPr algn="l" indent="0" marL="0">
-              <a:lnSpc>
-                <a:spcPct val="104000"/>
-              </a:lnSpc>
-              <a:buNone/>
-            </a:pPr>
-            <a:r>
-              <a:rPr lang="en-US" sz="1850" b="1" dirty="0">
-                <a:solidFill>
-                  <a:srgbClr val="000000"/>
-                </a:solidFill>
-                <a:latin typeface="Montserrat Bold" pitchFamily="34" charset="0"/>
-                <a:ea typeface="Montserrat Bold" pitchFamily="34" charset="-122"/>
-                <a:cs typeface="Montserrat Bold" pitchFamily="34" charset="-120"/>
-              </a:rPr>
               <a:t>Сообщение об ошибке</a:t>
             </a:r>
             <a:endParaRPr lang="en-US" sz="1850" dirty="0"/>
@@ -4342,7 +3998,7 @@
           </a:bodyPr>
           <a:lstStyle/>
           <a:p>
-            <a:pPr algn="l" indent="0" marL="0">
+            <a:pPr marL="0" indent="0" algn="l">
               <a:lnSpc>
                 <a:spcPct val="133000"/>
               </a:lnSpc>
@@ -4409,7 +4065,7 @@
           <a:bodyPr wrap="none" lIns="0" tIns="0" rIns="0" bIns="0" rtlCol="0" anchor="t"/>
           <a:lstStyle/>
           <a:p>
-            <a:pPr algn="l" indent="0" marL="0">
+            <a:pPr marL="0" indent="0" algn="l">
               <a:lnSpc>
                 <a:spcPct val="104000"/>
               </a:lnSpc>
@@ -4453,7 +4109,7 @@
           </a:bodyPr>
           <a:lstStyle/>
           <a:p>
-            <a:pPr algn="l" indent="0" marL="0">
+            <a:pPr marL="0" indent="0" algn="l">
               <a:lnSpc>
                 <a:spcPct val="133000"/>
               </a:lnSpc>
@@ -4470,12 +4126,6 @@
               </a:rPr>
               <a:t>Каждая колонка таблицы — одно </a:t>
             </a:r>
-            <a:pPr algn="l" indent="0" marL="0">
-              <a:lnSpc>
-                <a:spcPct val="133000"/>
-              </a:lnSpc>
-              <a:buNone/>
-            </a:pPr>
             <a:r>
               <a:rPr lang="en-US" sz="1450" b="1" dirty="0">
                 <a:solidFill>
@@ -4487,12 +4137,6 @@
               </a:rPr>
               <a:t>правило</a:t>
             </a:r>
-            <a:pPr algn="l" indent="0" marL="0">
-              <a:lnSpc>
-                <a:spcPct val="133000"/>
-              </a:lnSpc>
-              <a:buNone/>
-            </a:pPr>
             <a:r>
               <a:rPr lang="en-US" sz="1450" dirty="0">
                 <a:solidFill>
@@ -4524,17 +4168,41 @@
         </p:nvGraphicFramePr>
         <p:xfrm>
           <a:off x="661475" y="3215977"/>
-          <a:ext cx="9143771" cy="914400"/>
+          <a:ext cx="10868744" cy="2199426"/>
         </p:xfrm>
         <a:graphic>
           <a:graphicData uri="http://schemas.openxmlformats.org/drawingml/2006/table">
             <a:tbl>
               <a:tblPr/>
               <a:tblGrid>
-                <a:gridCol w="2717186"/>
-                <a:gridCol w="2717186"/>
-                <a:gridCol w="2717186"/>
-                <a:gridCol w="2717186"/>
+                <a:gridCol w="2717186">
+                  <a:extLst>
+                    <a:ext uri="{9D8B030D-6E8A-4147-A177-3AD203B41FA5}">
+                      <a16:colId xmlns:a16="http://schemas.microsoft.com/office/drawing/2014/main" val="20000"/>
+                    </a:ext>
+                  </a:extLst>
+                </a:gridCol>
+                <a:gridCol w="2717186">
+                  <a:extLst>
+                    <a:ext uri="{9D8B030D-6E8A-4147-A177-3AD203B41FA5}">
+                      <a16:colId xmlns:a16="http://schemas.microsoft.com/office/drawing/2014/main" val="20001"/>
+                    </a:ext>
+                  </a:extLst>
+                </a:gridCol>
+                <a:gridCol w="2717186">
+                  <a:extLst>
+                    <a:ext uri="{9D8B030D-6E8A-4147-A177-3AD203B41FA5}">
+                      <a16:colId xmlns:a16="http://schemas.microsoft.com/office/drawing/2014/main" val="20002"/>
+                    </a:ext>
+                  </a:extLst>
+                </a:gridCol>
+                <a:gridCol w="2717186">
+                  <a:extLst>
+                    <a:ext uri="{9D8B030D-6E8A-4147-A177-3AD203B41FA5}">
+                      <a16:colId xmlns:a16="http://schemas.microsoft.com/office/drawing/2014/main" val="20003"/>
+                    </a:ext>
+                  </a:extLst>
+                </a:gridCol>
               </a:tblGrid>
               <a:tr h="545094">
                 <a:tc>
@@ -4542,7 +4210,7 @@
                     <a:bodyPr/>
                     <a:lstStyle/>
                     <a:p>
-                      <a:pPr algn="l" indent="0" marL="0">
+                      <a:pPr marL="0" indent="0" algn="l">
                         <a:buNone/>
                       </a:pPr>
                       <a:r>
@@ -4610,7 +4278,7 @@
                     <a:bodyPr/>
                     <a:lstStyle/>
                     <a:p>
-                      <a:pPr algn="l" indent="0" marL="0">
+                      <a:pPr marL="0" indent="0" algn="l">
                         <a:buNone/>
                       </a:pPr>
                       <a:r>
@@ -4678,7 +4346,7 @@
                     <a:bodyPr/>
                     <a:lstStyle/>
                     <a:p>
-                      <a:pPr algn="l" indent="0" marL="0">
+                      <a:pPr marL="0" indent="0" algn="l">
                         <a:buNone/>
                       </a:pPr>
                       <a:r>
@@ -4746,7 +4414,7 @@
                     <a:bodyPr/>
                     <a:lstStyle/>
                     <a:p>
-                      <a:pPr algn="l" indent="0" marL="0">
+                      <a:pPr marL="0" indent="0" algn="l">
                         <a:buNone/>
                       </a:pPr>
                       <a:r>
@@ -4809,6 +4477,11 @@
                     </a:solidFill>
                   </a:tcPr>
                 </a:tc>
+                <a:extLst>
+                  <a:ext uri="{0D108BD9-81ED-4DB2-BD59-A6C34878D82A}">
+                    <a16:rowId xmlns:a16="http://schemas.microsoft.com/office/drawing/2014/main" val="10000"/>
+                  </a:ext>
+                </a:extLst>
               </a:tr>
               <a:tr h="554619">
                 <a:tc>
@@ -4816,7 +4489,7 @@
                     <a:bodyPr/>
                     <a:lstStyle/>
                     <a:p>
-                      <a:pPr algn="l" indent="0" marL="0">
+                      <a:pPr marL="0" indent="0" algn="l">
                         <a:buNone/>
                       </a:pPr>
                       <a:r>
@@ -4881,7 +4554,7 @@
                     <a:bodyPr/>
                     <a:lstStyle/>
                     <a:p>
-                      <a:pPr algn="l" indent="0" marL="0">
+                      <a:pPr marL="0" indent="0" algn="l">
                         <a:buNone/>
                       </a:pPr>
                       <a:r>
@@ -4946,7 +4619,7 @@
                     <a:bodyPr/>
                     <a:lstStyle/>
                     <a:p>
-                      <a:pPr algn="l" indent="0" marL="0">
+                      <a:pPr marL="0" indent="0" algn="l">
                         <a:buNone/>
                       </a:pPr>
                       <a:r>
@@ -5011,7 +4684,7 @@
                     <a:bodyPr/>
                     <a:lstStyle/>
                     <a:p>
-                      <a:pPr algn="l" indent="0" marL="0">
+                      <a:pPr marL="0" indent="0" algn="l">
                         <a:buNone/>
                       </a:pPr>
                       <a:r>
@@ -5071,6 +4744,11 @@
                     </a:lnB>
                   </a:tcPr>
                 </a:tc>
+                <a:extLst>
+                  <a:ext uri="{0D108BD9-81ED-4DB2-BD59-A6C34878D82A}">
+                    <a16:rowId xmlns:a16="http://schemas.microsoft.com/office/drawing/2014/main" val="10001"/>
+                  </a:ext>
+                </a:extLst>
               </a:tr>
               <a:tr h="554619">
                 <a:tc>
@@ -5078,7 +4756,7 @@
                     <a:bodyPr/>
                     <a:lstStyle/>
                     <a:p>
-                      <a:pPr algn="l" indent="0" marL="0">
+                      <a:pPr marL="0" indent="0" algn="l">
                         <a:buNone/>
                       </a:pPr>
                       <a:r>
@@ -5143,7 +4821,7 @@
                     <a:bodyPr/>
                     <a:lstStyle/>
                     <a:p>
-                      <a:pPr algn="l" indent="0" marL="0">
+                      <a:pPr marL="0" indent="0" algn="l">
                         <a:buNone/>
                       </a:pPr>
                       <a:r>
@@ -5208,7 +4886,7 @@
                     <a:bodyPr/>
                     <a:lstStyle/>
                     <a:p>
-                      <a:pPr algn="l" indent="0" marL="0">
+                      <a:pPr marL="0" indent="0" algn="l">
                         <a:buNone/>
                       </a:pPr>
                       <a:r>
@@ -5273,7 +4951,7 @@
                     <a:bodyPr/>
                     <a:lstStyle/>
                     <a:p>
-                      <a:pPr algn="l" indent="0" marL="0">
+                      <a:pPr marL="0" indent="0" algn="l">
                         <a:buNone/>
                       </a:pPr>
                       <a:r>
@@ -5333,6 +5011,11 @@
                     </a:lnB>
                   </a:tcPr>
                 </a:tc>
+                <a:extLst>
+                  <a:ext uri="{0D108BD9-81ED-4DB2-BD59-A6C34878D82A}">
+                    <a16:rowId xmlns:a16="http://schemas.microsoft.com/office/drawing/2014/main" val="10002"/>
+                  </a:ext>
+                </a:extLst>
               </a:tr>
               <a:tr h="545094">
                 <a:tc>
@@ -5340,7 +5023,7 @@
                     <a:bodyPr/>
                     <a:lstStyle/>
                     <a:p>
-                      <a:pPr algn="l" indent="0" marL="0">
+                      <a:pPr marL="0" indent="0" algn="l">
                         <a:buNone/>
                       </a:pPr>
                       <a:r>
@@ -5405,7 +5088,7 @@
                     <a:bodyPr/>
                     <a:lstStyle/>
                     <a:p>
-                      <a:pPr algn="l" indent="0" marL="0">
+                      <a:pPr marL="0" indent="0" algn="l">
                         <a:buNone/>
                       </a:pPr>
                       <a:r>
@@ -5470,7 +5153,7 @@
                     <a:bodyPr/>
                     <a:lstStyle/>
                     <a:p>
-                      <a:pPr algn="l" indent="0" marL="0">
+                      <a:pPr marL="0" indent="0" algn="l">
                         <a:buNone/>
                       </a:pPr>
                       <a:r>
@@ -5535,7 +5218,7 @@
                     <a:bodyPr/>
                     <a:lstStyle/>
                     <a:p>
-                      <a:pPr algn="l" indent="0" marL="0">
+                      <a:pPr marL="0" indent="0" algn="l">
                         <a:buNone/>
                       </a:pPr>
                       <a:r>
@@ -5595,6 +5278,11 @@
                     </a:lnB>
                   </a:tcPr>
                 </a:tc>
+                <a:extLst>
+                  <a:ext uri="{0D108BD9-81ED-4DB2-BD59-A6C34878D82A}">
+                    <a16:rowId xmlns:a16="http://schemas.microsoft.com/office/drawing/2014/main" val="10003"/>
+                  </a:ext>
+                </a:extLst>
               </a:tr>
             </a:tbl>
           </a:graphicData>
@@ -5648,7 +5336,7 @@
           </a:bodyPr>
           <a:lstStyle/>
           <a:p>
-            <a:pPr algn="l" indent="0" marL="0">
+            <a:pPr marL="0" indent="0" algn="l">
               <a:lnSpc>
                 <a:spcPct val="104000"/>
               </a:lnSpc>
@@ -5692,7 +5380,7 @@
           </a:bodyPr>
           <a:lstStyle/>
           <a:p>
-            <a:pPr algn="l" indent="0" marL="0">
+            <a:pPr marL="0" indent="0" algn="l">
               <a:lnSpc>
                 <a:spcPct val="130000"/>
               </a:lnSpc>
@@ -5709,13 +5397,108 @@
               </a:rPr>
               <a:t>Полная таблица</a:t>
             </a:r>
-            <a:pPr algn="l" indent="0" marL="0">
+            <a:r>
+              <a:rPr lang="en-US" sz="1400" dirty="0">
+                <a:solidFill>
+                  <a:srgbClr val="000000"/>
+                </a:solidFill>
+                <a:latin typeface="Open Sans" pitchFamily="34" charset="0"/>
+                <a:ea typeface="Open Sans" pitchFamily="34" charset="-122"/>
+                <a:cs typeface="Open Sans" pitchFamily="34" charset="-120"/>
+              </a:rPr>
+              <a:t> содержит все возможные комбинации. Три бинарных условия дают </a:t>
+            </a:r>
+            <a:r>
+              <a:rPr lang="en-US" sz="1400" b="1" dirty="0">
+                <a:solidFill>
+                  <a:srgbClr val="27B29F"/>
+                </a:solidFill>
+                <a:latin typeface="Open Sans Bold" pitchFamily="34" charset="0"/>
+                <a:ea typeface="Open Sans Bold" pitchFamily="34" charset="-122"/>
+                <a:cs typeface="Open Sans Bold" pitchFamily="34" charset="-120"/>
+              </a:rPr>
+              <a:t>8 комбинаций (2³)</a:t>
+            </a:r>
+            <a:r>
+              <a:rPr lang="en-US" sz="1400" dirty="0">
+                <a:solidFill>
+                  <a:srgbClr val="000000"/>
+                </a:solidFill>
+                <a:latin typeface="Open Sans" pitchFamily="34" charset="0"/>
+                <a:ea typeface="Open Sans" pitchFamily="34" charset="-122"/>
+                <a:cs typeface="Open Sans" pitchFamily="34" charset="-120"/>
+              </a:rPr>
+              <a:t>.</a:t>
+            </a:r>
+            <a:endParaRPr lang="en-US" sz="1400" dirty="0"/>
+          </a:p>
+        </p:txBody>
+      </p:sp>
+      <p:sp>
+        <p:nvSpPr>
+          <p:cNvPr id="4" name="Shape 2"/>
+          <p:cNvSpPr/>
+          <p:nvPr/>
+        </p:nvSpPr>
+        <p:spPr>
+          <a:xfrm>
+            <a:off x="661475" y="3562152"/>
+            <a:ext cx="5215303" cy="25400"/>
+          </a:xfrm>
+          <a:prstGeom prst="roundRect">
+            <a:avLst>
+              <a:gd name="adj" fmla="val 49999"/>
+            </a:avLst>
+          </a:prstGeom>
+          <a:solidFill>
+            <a:srgbClr val="000000">
+              <a:alpha val="50000"/>
+            </a:srgbClr>
+          </a:solidFill>
+          <a:ln/>
+        </p:spPr>
+      </p:sp>
+      <p:sp>
+        <p:nvSpPr>
+          <p:cNvPr id="5" name="Text 3"/>
+          <p:cNvSpPr/>
+          <p:nvPr/>
+        </p:nvSpPr>
+        <p:spPr>
+          <a:xfrm>
+            <a:off x="661475" y="3824288"/>
+            <a:ext cx="5215303" cy="840284"/>
+          </a:xfrm>
+          <a:prstGeom prst="rect">
+            <a:avLst/>
+          </a:prstGeom>
+          <a:noFill/>
+          <a:ln/>
+        </p:spPr>
+        <p:txBody>
+          <a:bodyPr wrap="square" lIns="0" tIns="0" rIns="0" bIns="0" rtlCol="0" anchor="t">
+            <a:normAutofit/>
+          </a:bodyPr>
+          <a:lstStyle/>
+          <a:p>
+            <a:pPr marL="0" indent="0" algn="l">
               <a:lnSpc>
                 <a:spcPct val="130000"/>
               </a:lnSpc>
               <a:buNone/>
             </a:pPr>
             <a:r>
+              <a:rPr lang="en-US" sz="1400" b="1" dirty="0">
+                <a:solidFill>
+                  <a:srgbClr val="000000"/>
+                </a:solidFill>
+                <a:latin typeface="Open Sans Bold" pitchFamily="34" charset="0"/>
+                <a:ea typeface="Open Sans Bold" pitchFamily="34" charset="-122"/>
+                <a:cs typeface="Open Sans Bold" pitchFamily="34" charset="-120"/>
+              </a:rPr>
+              <a:t>Сокращённая таблица</a:t>
+            </a:r>
+            <a:r>
               <a:rPr lang="en-US" sz="1400" dirty="0">
                 <a:solidFill>
                   <a:srgbClr val="000000"/>
@@ -5724,41 +5507,7 @@
                 <a:ea typeface="Open Sans" pitchFamily="34" charset="-122"/>
                 <a:cs typeface="Open Sans" pitchFamily="34" charset="-120"/>
               </a:rPr>
-              <a:t> содержит все возможные комбинации. Три бинарных условия дают </a:t>
-            </a:r>
-            <a:pPr algn="l" indent="0" marL="0">
-              <a:lnSpc>
-                <a:spcPct val="130000"/>
-              </a:lnSpc>
-              <a:buNone/>
-            </a:pPr>
-            <a:r>
-              <a:rPr lang="en-US" sz="1400" b="1" dirty="0">
-                <a:solidFill>
-                  <a:srgbClr val="27B29F"/>
-                </a:solidFill>
-                <a:latin typeface="Open Sans Bold" pitchFamily="34" charset="0"/>
-                <a:ea typeface="Open Sans Bold" pitchFamily="34" charset="-122"/>
-                <a:cs typeface="Open Sans Bold" pitchFamily="34" charset="-120"/>
-              </a:rPr>
-              <a:t>8 комбинаций (2³)</a:t>
-            </a:r>
-            <a:pPr algn="l" indent="0" marL="0">
-              <a:lnSpc>
-                <a:spcPct val="130000"/>
-              </a:lnSpc>
-              <a:buNone/>
-            </a:pPr>
-            <a:r>
-              <a:rPr lang="en-US" sz="1400" dirty="0">
-                <a:solidFill>
-                  <a:srgbClr val="000000"/>
-                </a:solidFill>
-                <a:latin typeface="Open Sans" pitchFamily="34" charset="0"/>
-                <a:ea typeface="Open Sans" pitchFamily="34" charset="-122"/>
-                <a:cs typeface="Open Sans" pitchFamily="34" charset="-120"/>
-              </a:rPr>
-              <a:t>.</a:t>
+              <a:t> объединяет эквивалентные правила, когда несколько комбинаций приводят к одному результату.</a:t>
             </a:r>
             <a:endParaRPr lang="en-US" sz="1400" dirty="0"/>
           </a:p>
@@ -5766,38 +5515,14 @@
       </p:sp>
       <p:sp>
         <p:nvSpPr>
-          <p:cNvPr id="4" name="Shape 2"/>
-          <p:cNvSpPr/>
-          <p:nvPr/>
-        </p:nvSpPr>
-        <p:spPr>
-          <a:xfrm>
-            <a:off x="661475" y="3562152"/>
-            <a:ext cx="5215303" cy="25400"/>
-          </a:xfrm>
-          <a:prstGeom prst="roundRect">
-            <a:avLst>
-              <a:gd name="adj" fmla="val 49999"/>
-            </a:avLst>
-          </a:prstGeom>
-          <a:solidFill>
-            <a:srgbClr val="000000">
-              <a:alpha val="50000"/>
-            </a:srgbClr>
-          </a:solidFill>
-          <a:ln/>
-        </p:spPr>
-      </p:sp>
-      <p:sp>
-        <p:nvSpPr>
-          <p:cNvPr id="5" name="Text 3"/>
-          <p:cNvSpPr/>
-          <p:nvPr/>
-        </p:nvSpPr>
-        <p:spPr>
-          <a:xfrm>
-            <a:off x="661475" y="3824288"/>
-            <a:ext cx="5215303" cy="840284"/>
+          <p:cNvPr id="6" name="Text 4"/>
+          <p:cNvSpPr/>
+          <p:nvPr/>
+        </p:nvSpPr>
+        <p:spPr>
+          <a:xfrm>
+            <a:off x="661475" y="4818063"/>
+            <a:ext cx="5215303" cy="1239639"/>
           </a:xfrm>
           <a:prstGeom prst="rect">
             <a:avLst/>
@@ -5811,68 +5536,7 @@
           </a:bodyPr>
           <a:lstStyle/>
           <a:p>
-            <a:pPr algn="l" indent="0" marL="0">
-              <a:lnSpc>
-                <a:spcPct val="130000"/>
-              </a:lnSpc>
-              <a:buNone/>
-            </a:pPr>
-            <a:r>
-              <a:rPr lang="en-US" sz="1400" b="1" dirty="0">
-                <a:solidFill>
-                  <a:srgbClr val="000000"/>
-                </a:solidFill>
-                <a:latin typeface="Open Sans Bold" pitchFamily="34" charset="0"/>
-                <a:ea typeface="Open Sans Bold" pitchFamily="34" charset="-122"/>
-                <a:cs typeface="Open Sans Bold" pitchFamily="34" charset="-120"/>
-              </a:rPr>
-              <a:t>Сокращённая таблица</a:t>
-            </a:r>
-            <a:pPr algn="l" indent="0" marL="0">
-              <a:lnSpc>
-                <a:spcPct val="130000"/>
-              </a:lnSpc>
-              <a:buNone/>
-            </a:pPr>
-            <a:r>
-              <a:rPr lang="en-US" sz="1400" dirty="0">
-                <a:solidFill>
-                  <a:srgbClr val="000000"/>
-                </a:solidFill>
-                <a:latin typeface="Open Sans" pitchFamily="34" charset="0"/>
-                <a:ea typeface="Open Sans" pitchFamily="34" charset="-122"/>
-                <a:cs typeface="Open Sans" pitchFamily="34" charset="-120"/>
-              </a:rPr>
-              <a:t> объединяет эквивалентные правила, когда несколько комбинаций приводят к одному результату.</a:t>
-            </a:r>
-            <a:endParaRPr lang="en-US" sz="1400" dirty="0"/>
-          </a:p>
-        </p:txBody>
-      </p:sp>
-      <p:sp>
-        <p:nvSpPr>
-          <p:cNvPr id="6" name="Text 4"/>
-          <p:cNvSpPr/>
-          <p:nvPr/>
-        </p:nvSpPr>
-        <p:spPr>
-          <a:xfrm>
-            <a:off x="661475" y="4818063"/>
-            <a:ext cx="5215303" cy="1239639"/>
-          </a:xfrm>
-          <a:prstGeom prst="rect">
-            <a:avLst/>
-          </a:prstGeom>
-          <a:noFill/>
-          <a:ln/>
-        </p:spPr>
-        <p:txBody>
-          <a:bodyPr wrap="square" lIns="0" tIns="0" rIns="0" bIns="0" rtlCol="0" anchor="t">
-            <a:normAutofit/>
-          </a:bodyPr>
-          <a:lstStyle/>
-          <a:p>
-            <a:pPr algn="l" marL="284480" indent="-284480">
+            <a:pPr marL="284480" indent="-284480" algn="l">
               <a:lnSpc>
                 <a:spcPct val="130000"/>
               </a:lnSpc>
@@ -5893,7 +5557,7 @@
             <a:endParaRPr lang="en-US" sz="1400" dirty="0"/>
           </a:p>
           <a:p>
-            <a:pPr algn="l" marL="284480" indent="-284480">
+            <a:pPr marL="284480" indent="-284480" algn="l">
               <a:lnSpc>
                 <a:spcPct val="130000"/>
               </a:lnSpc>
@@ -5914,7 +5578,7 @@
             <a:endParaRPr lang="en-US" sz="1400" dirty="0"/>
           </a:p>
           <a:p>
-            <a:pPr algn="l" marL="284480" indent="-284480">
+            <a:pPr marL="284480" indent="-284480" algn="l">
               <a:lnSpc>
                 <a:spcPct val="130000"/>
               </a:lnSpc>
@@ -5938,14 +5602,14 @@
       </p:sp>
       <p:pic>
         <p:nvPicPr>
-          <p:cNvPr id="7" name="Image 0" descr="preencoded.png">    </p:cNvPr>
+          <p:cNvPr id="7" name="Image 0" descr="preencoded.png"/>
           <p:cNvPicPr>
             <a:picLocks noChangeAspect="1"/>
           </p:cNvPicPr>
           <p:nvPr/>
         </p:nvPicPr>
         <p:blipFill>
-          <a:blip r:embed="rId1"/>
+          <a:blip r:embed="rId3"/>
           <a:stretch>
             <a:fillRect/>
           </a:stretch>
@@ -6007,14 +5671,14 @@
       </p:sp>
       <p:pic>
         <p:nvPicPr>
-          <p:cNvPr id="3" name="Image 0" descr="preencoded.png">    </p:cNvPr>
+          <p:cNvPr id="3" name="Image 0" descr="preencoded.png"/>
           <p:cNvPicPr>
             <a:picLocks noChangeAspect="1"/>
           </p:cNvPicPr>
           <p:nvPr/>
         </p:nvPicPr>
         <p:blipFill>
-          <a:blip r:embed="rId1"/>
+          <a:blip r:embed="rId3"/>
           <a:stretch>
             <a:fillRect/>
           </a:stretch>
@@ -6052,7 +5716,7 @@
           </a:bodyPr>
           <a:lstStyle/>
           <a:p>
-            <a:pPr algn="l" indent="0" marL="0">
+            <a:pPr marL="0" indent="0" algn="l">
               <a:lnSpc>
                 <a:spcPct val="104000"/>
               </a:lnSpc>
@@ -6096,7 +5760,7 @@
           </a:bodyPr>
           <a:lstStyle/>
           <a:p>
-            <a:pPr algn="l" indent="0" marL="0">
+            <a:pPr marL="0" indent="0" algn="l">
               <a:lnSpc>
                 <a:spcPct val="127000"/>
               </a:lnSpc>
@@ -6113,7 +5777,56 @@
               </a:rPr>
               <a:t>Означает: значение этого условия </a:t>
             </a:r>
-            <a:pPr algn="l" indent="0" marL="0">
+            <a:r>
+              <a:rPr lang="en-US" sz="1300" b="1" dirty="0">
+                <a:solidFill>
+                  <a:srgbClr val="000000"/>
+                </a:solidFill>
+                <a:latin typeface="Open Sans Bold" pitchFamily="34" charset="0"/>
+                <a:ea typeface="Open Sans Bold" pitchFamily="34" charset="-122"/>
+                <a:cs typeface="Open Sans Bold" pitchFamily="34" charset="-120"/>
+              </a:rPr>
+              <a:t>не влияет на результат</a:t>
+            </a:r>
+            <a:r>
+              <a:rPr lang="en-US" sz="1300" dirty="0">
+                <a:solidFill>
+                  <a:srgbClr val="000000"/>
+                </a:solidFill>
+                <a:latin typeface="Open Sans" pitchFamily="34" charset="0"/>
+                <a:ea typeface="Open Sans" pitchFamily="34" charset="-122"/>
+                <a:cs typeface="Open Sans" pitchFamily="34" charset="-120"/>
+              </a:rPr>
+              <a:t> для данного правила. Позволяет объединить несколько похожих колонок в одну.</a:t>
+            </a:r>
+            <a:endParaRPr lang="en-US" sz="1300" dirty="0"/>
+          </a:p>
+        </p:txBody>
+      </p:sp>
+      <p:sp>
+        <p:nvSpPr>
+          <p:cNvPr id="6" name="Text 3"/>
+          <p:cNvSpPr/>
+          <p:nvPr/>
+        </p:nvSpPr>
+        <p:spPr>
+          <a:xfrm>
+            <a:off x="916560" y="2835374"/>
+            <a:ext cx="2685884" cy="1034256"/>
+          </a:xfrm>
+          <a:prstGeom prst="rect">
+            <a:avLst/>
+          </a:prstGeom>
+          <a:noFill/>
+          <a:ln/>
+        </p:spPr>
+        <p:txBody>
+          <a:bodyPr wrap="square" lIns="0" tIns="0" rIns="0" bIns="0" rtlCol="0" anchor="t">
+            <a:normAutofit/>
+          </a:bodyPr>
+          <a:lstStyle/>
+          <a:p>
+            <a:pPr marL="0" indent="0" algn="l">
               <a:lnSpc>
                 <a:spcPct val="127000"/>
               </a:lnSpc>
@@ -6128,75 +5841,8 @@
                 <a:ea typeface="Open Sans Bold" pitchFamily="34" charset="-122"/>
                 <a:cs typeface="Open Sans Bold" pitchFamily="34" charset="-120"/>
               </a:rPr>
-              <a:t>не влияет на результат</a:t>
-            </a:r>
-            <a:pPr algn="l" indent="0" marL="0">
-              <a:lnSpc>
-                <a:spcPct val="127000"/>
-              </a:lnSpc>
-              <a:buNone/>
-            </a:pPr>
-            <a:r>
-              <a:rPr lang="en-US" sz="1300" dirty="0">
-                <a:solidFill>
-                  <a:srgbClr val="000000"/>
-                </a:solidFill>
-                <a:latin typeface="Open Sans" pitchFamily="34" charset="0"/>
-                <a:ea typeface="Open Sans" pitchFamily="34" charset="-122"/>
-                <a:cs typeface="Open Sans" pitchFamily="34" charset="-120"/>
-              </a:rPr>
-              <a:t> для данного правила. Позволяет объединить несколько похожих колонок в одну.</a:t>
-            </a:r>
-            <a:endParaRPr lang="en-US" sz="1300" dirty="0"/>
-          </a:p>
-        </p:txBody>
-      </p:sp>
-      <p:sp>
-        <p:nvSpPr>
-          <p:cNvPr id="6" name="Text 3"/>
-          <p:cNvSpPr/>
-          <p:nvPr/>
-        </p:nvSpPr>
-        <p:spPr>
-          <a:xfrm>
-            <a:off x="916560" y="2835374"/>
-            <a:ext cx="2685884" cy="1034256"/>
-          </a:xfrm>
-          <a:prstGeom prst="rect">
-            <a:avLst/>
-          </a:prstGeom>
-          <a:noFill/>
-          <a:ln/>
-        </p:spPr>
-        <p:txBody>
-          <a:bodyPr wrap="square" lIns="0" tIns="0" rIns="0" bIns="0" rtlCol="0" anchor="t">
-            <a:normAutofit/>
-          </a:bodyPr>
-          <a:lstStyle/>
-          <a:p>
-            <a:pPr algn="l" indent="0" marL="0">
-              <a:lnSpc>
-                <a:spcPct val="127000"/>
-              </a:lnSpc>
-              <a:buNone/>
-            </a:pPr>
-            <a:r>
-              <a:rPr lang="en-US" sz="1300" b="1" dirty="0">
-                <a:solidFill>
-                  <a:srgbClr val="000000"/>
-                </a:solidFill>
-                <a:latin typeface="Open Sans Bold" pitchFamily="34" charset="0"/>
-                <a:ea typeface="Open Sans Bold" pitchFamily="34" charset="-122"/>
-                <a:cs typeface="Open Sans Bold" pitchFamily="34" charset="-120"/>
-              </a:rPr>
               <a:t>Пример:</a:t>
             </a:r>
-            <a:pPr algn="l" indent="0" marL="0">
-              <a:lnSpc>
-                <a:spcPct val="127000"/>
-              </a:lnSpc>
-              <a:buNone/>
-            </a:pPr>
             <a:r>
               <a:rPr lang="en-US" sz="1300" dirty="0">
                 <a:solidFill>
@@ -6257,7 +5903,7 @@
           </a:bodyPr>
           <a:lstStyle/>
           <a:p>
-            <a:pPr algn="l" indent="0" marL="0">
+            <a:pPr marL="0" indent="0" algn="l">
               <a:lnSpc>
                 <a:spcPct val="104000"/>
               </a:lnSpc>
@@ -6301,7 +5947,7 @@
           </a:bodyPr>
           <a:lstStyle/>
           <a:p>
-            <a:pPr algn="l" indent="0" marL="0">
+            <a:pPr marL="0" indent="0" algn="l">
               <a:lnSpc>
                 <a:spcPct val="104000"/>
               </a:lnSpc>
@@ -6345,7 +5991,7 @@
           </a:bodyPr>
           <a:lstStyle/>
           <a:p>
-            <a:pPr algn="l" indent="0" marL="0">
+            <a:pPr marL="0" indent="0" algn="l">
               <a:lnSpc>
                 <a:spcPct val="104000"/>
               </a:lnSpc>
@@ -6412,7 +6058,7 @@
           <a:bodyPr wrap="none" lIns="0" tIns="0" rIns="0" bIns="0" rtlCol="0" anchor="t"/>
           <a:lstStyle/>
           <a:p>
-            <a:pPr algn="l" indent="0" marL="0">
+            <a:pPr marL="0" indent="0" algn="l">
               <a:lnSpc>
                 <a:spcPct val="104000"/>
               </a:lnSpc>
@@ -6435,14 +6081,14 @@
       </p:sp>
       <p:pic>
         <p:nvPicPr>
-          <p:cNvPr id="3" name="Image 0" descr="preencoded.png">    </p:cNvPr>
+          <p:cNvPr id="3" name="Image 0" descr="preencoded.png"/>
           <p:cNvPicPr>
             <a:picLocks noChangeAspect="1"/>
           </p:cNvPicPr>
           <p:nvPr/>
         </p:nvPicPr>
         <p:blipFill>
-          <a:blip r:embed="rId1"/>
+          <a:blip r:embed="rId3"/>
           <a:stretch>
             <a:fillRect/>
           </a:stretch>
@@ -6478,7 +6124,7 @@
           <a:bodyPr wrap="none" lIns="0" tIns="0" rIns="0" bIns="0" rtlCol="0" anchor="t"/>
           <a:lstStyle/>
           <a:p>
-            <a:pPr algn="l" indent="0" marL="0">
+            <a:pPr marL="0" indent="0" algn="l">
               <a:lnSpc>
                 <a:spcPct val="104000"/>
               </a:lnSpc>
@@ -6520,7 +6166,7 @@
           <a:bodyPr wrap="none" lIns="0" tIns="0" rIns="0" bIns="0" rtlCol="0" anchor="t"/>
           <a:lstStyle/>
           <a:p>
-            <a:pPr algn="l" indent="0" marL="0">
+            <a:pPr marL="0" indent="0" algn="l">
               <a:lnSpc>
                 <a:spcPct val="91000"/>
               </a:lnSpc>
@@ -6562,7 +6208,7 @@
           <a:bodyPr wrap="none" lIns="0" tIns="0" rIns="0" bIns="0" rtlCol="0" anchor="t"/>
           <a:lstStyle/>
           <a:p>
-            <a:pPr algn="r" indent="0" marL="0">
+            <a:pPr marL="0" indent="0" algn="r">
               <a:lnSpc>
                 <a:spcPct val="104000"/>
               </a:lnSpc>
@@ -6604,7 +6250,7 @@
           <a:bodyPr wrap="none" lIns="0" tIns="0" rIns="0" bIns="0" rtlCol="0" anchor="t"/>
           <a:lstStyle/>
           <a:p>
-            <a:pPr algn="r" indent="0" marL="0">
+            <a:pPr marL="0" indent="0" algn="r">
               <a:lnSpc>
                 <a:spcPct val="91000"/>
               </a:lnSpc>
@@ -6646,7 +6292,7 @@
           <a:bodyPr wrap="none" lIns="0" tIns="0" rIns="0" bIns="0" rtlCol="0" anchor="t"/>
           <a:lstStyle/>
           <a:p>
-            <a:pPr algn="l" indent="0" marL="0">
+            <a:pPr marL="0" indent="0" algn="l">
               <a:lnSpc>
                 <a:spcPct val="104000"/>
               </a:lnSpc>
@@ -6688,7 +6334,7 @@
           <a:bodyPr wrap="none" lIns="0" tIns="0" rIns="0" bIns="0" rtlCol="0" anchor="t"/>
           <a:lstStyle/>
           <a:p>
-            <a:pPr algn="l" indent="0" marL="0">
+            <a:pPr marL="0" indent="0" algn="l">
               <a:lnSpc>
                 <a:spcPct val="91000"/>
               </a:lnSpc>
@@ -6730,7 +6376,7 @@
           <a:bodyPr wrap="none" lIns="0" tIns="0" rIns="0" bIns="0" rtlCol="0" anchor="t"/>
           <a:lstStyle/>
           <a:p>
-            <a:pPr algn="r" indent="0" marL="0">
+            <a:pPr marL="0" indent="0" algn="r">
               <a:lnSpc>
                 <a:spcPct val="104000"/>
               </a:lnSpc>
@@ -6772,7 +6418,7 @@
           <a:bodyPr wrap="none" lIns="0" tIns="0" rIns="0" bIns="0" rtlCol="0" anchor="t"/>
           <a:lstStyle/>
           <a:p>
-            <a:pPr algn="r" indent="0" marL="0">
+            <a:pPr marL="0" indent="0" algn="r">
               <a:lnSpc>
                 <a:spcPct val="91000"/>
               </a:lnSpc>
@@ -6814,7 +6460,7 @@
           <a:bodyPr wrap="none" lIns="0" tIns="0" rIns="0" bIns="0" rtlCol="0" anchor="t"/>
           <a:lstStyle/>
           <a:p>
-            <a:pPr algn="l" indent="0" marL="0">
+            <a:pPr marL="0" indent="0" algn="l">
               <a:lnSpc>
                 <a:spcPct val="117000"/>
               </a:lnSpc>
@@ -6831,12 +6477,6 @@
               </a:rPr>
               <a:t>Если для комбинации нет однозначного поведения — это </a:t>
             </a:r>
-            <a:pPr algn="l" indent="0" marL="0">
-              <a:lnSpc>
-                <a:spcPct val="117000"/>
-              </a:lnSpc>
-              <a:buNone/>
-            </a:pPr>
             <a:r>
               <a:rPr lang="en-US" sz="1100" b="1" dirty="0">
                 <a:solidFill>
@@ -6848,12 +6488,6 @@
               </a:rPr>
               <a:t>пробел в требованиях</a:t>
             </a:r>
-            <a:pPr algn="l" indent="0" marL="0">
-              <a:lnSpc>
-                <a:spcPct val="117000"/>
-              </a:lnSpc>
-              <a:buNone/>
-            </a:pPr>
             <a:r>
               <a:rPr lang="en-US" sz="1100" dirty="0">
                 <a:solidFill>
@@ -6916,14 +6550,14 @@
       </p:sp>
       <p:pic>
         <p:nvPicPr>
-          <p:cNvPr id="3" name="Image 0" descr="preencoded.png">    </p:cNvPr>
+          <p:cNvPr id="3" name="Image 0" descr="preencoded.png"/>
           <p:cNvPicPr>
             <a:picLocks noChangeAspect="1"/>
           </p:cNvPicPr>
           <p:nvPr/>
         </p:nvPicPr>
         <p:blipFill>
-          <a:blip r:embed="rId1"/>
+          <a:blip r:embed="rId3"/>
           <a:stretch>
             <a:fillRect/>
           </a:stretch>
@@ -6959,7 +6593,7 @@
           <a:bodyPr wrap="none" lIns="0" tIns="0" rIns="0" bIns="0" rtlCol="0" anchor="t"/>
           <a:lstStyle/>
           <a:p>
-            <a:pPr algn="l" indent="0" marL="0">
+            <a:pPr marL="0" indent="0" algn="l">
               <a:lnSpc>
                 <a:spcPct val="104000"/>
               </a:lnSpc>
@@ -6982,17 +6616,17 @@
       </p:sp>
       <p:pic>
         <p:nvPicPr>
-          <p:cNvPr id="5" name="Image 1" descr="preencoded.png">    </p:cNvPr>
+          <p:cNvPr id="5" name="Image 1" descr="preencoded.png"/>
           <p:cNvPicPr>
             <a:picLocks noChangeAspect="1"/>
           </p:cNvPicPr>
           <p:nvPr/>
         </p:nvPicPr>
         <p:blipFill>
-          <a:blip r:embed="rId2">
+          <a:blip>
             <a:extLst>
               <a:ext uri="{96DAC541-7B7A-43D3-8B79-37D633B846F1}">
-                <asvg:svgBlip xmlns:asvg="http://schemas.microsoft.com/office/drawing/2016/SVG/main" r:embed="rId3"/>
+                <asvg:svgBlip xmlns:asvg="http://schemas.microsoft.com/office/drawing/2016/SVG/main" r:embed="rId4"/>
               </a:ext>
             </a:extLst>
           </a:blip>
@@ -7031,7 +6665,7 @@
           <a:bodyPr wrap="none" lIns="0" tIns="0" rIns="0" bIns="0" rtlCol="0" anchor="ctr"/>
           <a:lstStyle/>
           <a:p>
-            <a:pPr algn="ctr" indent="0" marL="0">
+            <a:pPr marL="0" indent="0" algn="ctr">
               <a:lnSpc>
                 <a:spcPct val="100000"/>
               </a:lnSpc>
@@ -7073,7 +6707,7 @@
           <a:bodyPr wrap="none" lIns="0" tIns="0" rIns="0" bIns="0" rtlCol="0" anchor="t"/>
           <a:lstStyle/>
           <a:p>
-            <a:pPr algn="l" indent="0" marL="0">
+            <a:pPr marL="0" indent="0" algn="l">
               <a:lnSpc>
                 <a:spcPct val="104000"/>
               </a:lnSpc>
@@ -7117,7 +6751,7 @@
           </a:bodyPr>
           <a:lstStyle/>
           <a:p>
-            <a:pPr algn="l" indent="0" marL="0">
+            <a:pPr marL="0" indent="0" algn="l">
               <a:lnSpc>
                 <a:spcPct val="123000"/>
               </a:lnSpc>
@@ -7140,17 +6774,17 @@
       </p:sp>
       <p:pic>
         <p:nvPicPr>
-          <p:cNvPr id="9" name="Image 2" descr="preencoded.png">    </p:cNvPr>
+          <p:cNvPr id="9" name="Image 2" descr="preencoded.png"/>
           <p:cNvPicPr>
             <a:picLocks noChangeAspect="1"/>
           </p:cNvPicPr>
           <p:nvPr/>
         </p:nvPicPr>
         <p:blipFill>
-          <a:blip r:embed="rId4">
+          <a:blip>
             <a:extLst>
               <a:ext uri="{96DAC541-7B7A-43D3-8B79-37D633B846F1}">
-                <asvg:svgBlip xmlns:asvg="http://schemas.microsoft.com/office/drawing/2016/SVG/main" r:embed="rId5"/>
+                <asvg:svgBlip xmlns:asvg="http://schemas.microsoft.com/office/drawing/2016/SVG/main" r:embed="rId4"/>
               </a:ext>
             </a:extLst>
           </a:blip>
@@ -7189,7 +6823,7 @@
           <a:bodyPr wrap="none" lIns="0" tIns="0" rIns="0" bIns="0" rtlCol="0" anchor="ctr"/>
           <a:lstStyle/>
           <a:p>
-            <a:pPr algn="ctr" indent="0" marL="0">
+            <a:pPr marL="0" indent="0" algn="ctr">
               <a:lnSpc>
                 <a:spcPct val="100000"/>
               </a:lnSpc>
@@ -7231,7 +6865,7 @@
           <a:bodyPr wrap="none" lIns="0" tIns="0" rIns="0" bIns="0" rtlCol="0" anchor="t"/>
           <a:lstStyle/>
           <a:p>
-            <a:pPr algn="l" indent="0" marL="0">
+            <a:pPr marL="0" indent="0" algn="l">
               <a:lnSpc>
                 <a:spcPct val="104000"/>
               </a:lnSpc>
@@ -7275,7 +6909,7 @@
           </a:bodyPr>
           <a:lstStyle/>
           <a:p>
-            <a:pPr algn="l" indent="0" marL="0">
+            <a:pPr marL="0" indent="0" algn="l">
               <a:lnSpc>
                 <a:spcPct val="123000"/>
               </a:lnSpc>
@@ -7298,17 +6932,17 @@
       </p:sp>
       <p:pic>
         <p:nvPicPr>
-          <p:cNvPr id="13" name="Image 3" descr="preencoded.png">    </p:cNvPr>
+          <p:cNvPr id="13" name="Image 3" descr="preencoded.png"/>
           <p:cNvPicPr>
             <a:picLocks noChangeAspect="1"/>
           </p:cNvPicPr>
           <p:nvPr/>
         </p:nvPicPr>
         <p:blipFill>
-          <a:blip r:embed="rId6">
+          <a:blip>
             <a:extLst>
               <a:ext uri="{96DAC541-7B7A-43D3-8B79-37D633B846F1}">
-                <asvg:svgBlip xmlns:asvg="http://schemas.microsoft.com/office/drawing/2016/SVG/main" r:embed="rId7"/>
+                <asvg:svgBlip xmlns:asvg="http://schemas.microsoft.com/office/drawing/2016/SVG/main" r:embed="rId4"/>
               </a:ext>
             </a:extLst>
           </a:blip>
@@ -7347,7 +6981,7 @@
           <a:bodyPr wrap="none" lIns="0" tIns="0" rIns="0" bIns="0" rtlCol="0" anchor="ctr"/>
           <a:lstStyle/>
           <a:p>
-            <a:pPr algn="ctr" indent="0" marL="0">
+            <a:pPr marL="0" indent="0" algn="ctr">
               <a:lnSpc>
                 <a:spcPct val="100000"/>
               </a:lnSpc>
@@ -7389,7 +7023,7 @@
           <a:bodyPr wrap="none" lIns="0" tIns="0" rIns="0" bIns="0" rtlCol="0" anchor="t"/>
           <a:lstStyle/>
           <a:p>
-            <a:pPr algn="l" indent="0" marL="0">
+            <a:pPr marL="0" indent="0" algn="l">
               <a:lnSpc>
                 <a:spcPct val="104000"/>
               </a:lnSpc>
@@ -7433,7 +7067,7 @@
           </a:bodyPr>
           <a:lstStyle/>
           <a:p>
-            <a:pPr algn="l" indent="0" marL="0">
+            <a:pPr marL="0" indent="0" algn="l">
               <a:lnSpc>
                 <a:spcPct val="123000"/>
               </a:lnSpc>
@@ -7456,17 +7090,17 @@
       </p:sp>
       <p:pic>
         <p:nvPicPr>
-          <p:cNvPr id="17" name="Image 4" descr="preencoded.png">    </p:cNvPr>
+          <p:cNvPr id="17" name="Image 4" descr="preencoded.png"/>
           <p:cNvPicPr>
             <a:picLocks noChangeAspect="1"/>
           </p:cNvPicPr>
           <p:nvPr/>
         </p:nvPicPr>
         <p:blipFill>
-          <a:blip r:embed="rId8">
+          <a:blip>
             <a:extLst>
               <a:ext uri="{96DAC541-7B7A-43D3-8B79-37D633B846F1}">
-                <asvg:svgBlip xmlns:asvg="http://schemas.microsoft.com/office/drawing/2016/SVG/main" r:embed="rId9"/>
+                <asvg:svgBlip xmlns:asvg="http://schemas.microsoft.com/office/drawing/2016/SVG/main" r:embed="rId4"/>
               </a:ext>
             </a:extLst>
           </a:blip>
@@ -7505,7 +7139,7 @@
           <a:bodyPr wrap="none" lIns="0" tIns="0" rIns="0" bIns="0" rtlCol="0" anchor="ctr"/>
           <a:lstStyle/>
           <a:p>
-            <a:pPr algn="ctr" indent="0" marL="0">
+            <a:pPr marL="0" indent="0" algn="ctr">
               <a:lnSpc>
                 <a:spcPct val="100000"/>
               </a:lnSpc>
@@ -7547,7 +7181,7 @@
           <a:bodyPr wrap="none" lIns="0" tIns="0" rIns="0" bIns="0" rtlCol="0" anchor="t"/>
           <a:lstStyle/>
           <a:p>
-            <a:pPr algn="l" indent="0" marL="0">
+            <a:pPr marL="0" indent="0" algn="l">
               <a:lnSpc>
                 <a:spcPct val="104000"/>
               </a:lnSpc>
@@ -7591,7 +7225,7 @@
           </a:bodyPr>
           <a:lstStyle/>
           <a:p>
-            <a:pPr algn="l" indent="0" marL="0">
+            <a:pPr marL="0" indent="0" algn="l">
               <a:lnSpc>
                 <a:spcPct val="123000"/>
               </a:lnSpc>
@@ -7913,4 +7547,299 @@
     </a:ext>
   </a:extLst>
 </a:theme>
+</file>
+
+<file path=ppt/theme/theme2.xml><?xml version="1.0" encoding="utf-8"?>
+<a:theme xmlns:a="http://schemas.openxmlformats.org/drawingml/2006/main" name="Тема Office">
+  <a:themeElements>
+    <a:clrScheme name="Стандартная">
+      <a:dk1>
+        <a:sysClr val="windowText" lastClr="000000"/>
+      </a:dk1>
+      <a:lt1>
+        <a:sysClr val="window" lastClr="FFFFFF"/>
+      </a:lt1>
+      <a:dk2>
+        <a:srgbClr val="44546A"/>
+      </a:dk2>
+      <a:lt2>
+        <a:srgbClr val="E7E6E6"/>
+      </a:lt2>
+      <a:accent1>
+        <a:srgbClr val="4472C4"/>
+      </a:accent1>
+      <a:accent2>
+        <a:srgbClr val="ED7D31"/>
+      </a:accent2>
+      <a:accent3>
+        <a:srgbClr val="A5A5A5"/>
+      </a:accent3>
+      <a:accent4>
+        <a:srgbClr val="FFC000"/>
+      </a:accent4>
+      <a:accent5>
+        <a:srgbClr val="5B9BD5"/>
+      </a:accent5>
+      <a:accent6>
+        <a:srgbClr val="70AD47"/>
+      </a:accent6>
+      <a:hlink>
+        <a:srgbClr val="0563C1"/>
+      </a:hlink>
+      <a:folHlink>
+        <a:srgbClr val="954F72"/>
+      </a:folHlink>
+    </a:clrScheme>
+    <a:fontScheme name="Стандартная">
+      <a:majorFont>
+        <a:latin typeface="Calibri Light" panose="020F0302020204030204"/>
+        <a:ea typeface=""/>
+        <a:cs typeface=""/>
+        <a:font script="Jpan" typeface="游ゴシック Light"/>
+        <a:font script="Hang" typeface="맑은 고딕"/>
+        <a:font script="Hans" typeface="等线 Light"/>
+        <a:font script="Hant" typeface="新細明體"/>
+        <a:font script="Arab" typeface="Times New Roman"/>
+        <a:font script="Hebr" typeface="Times New Roman"/>
+        <a:font script="Thai" typeface="Angsana New"/>
+        <a:font script="Ethi" typeface="Nyala"/>
+        <a:font script="Beng" typeface="Vrinda"/>
+        <a:font script="Gujr" typeface="Shruti"/>
+        <a:font script="Khmr" typeface="MoolBoran"/>
+        <a:font script="Knda" typeface="Tunga"/>
+        <a:font script="Guru" typeface="Raavi"/>
+        <a:font script="Cans" typeface="Euphemia"/>
+        <a:font script="Cher" typeface="Plantagenet Cherokee"/>
+        <a:font script="Yiii" typeface="Microsoft Yi Baiti"/>
+        <a:font script="Tibt" typeface="Microsoft Himalaya"/>
+        <a:font script="Thaa" typeface="MV Boli"/>
+        <a:font script="Deva" typeface="Mangal"/>
+        <a:font script="Telu" typeface="Gautami"/>
+        <a:font script="Taml" typeface="Latha"/>
+        <a:font script="Syrc" typeface="Estrangelo Edessa"/>
+        <a:font script="Orya" typeface="Kalinga"/>
+        <a:font script="Mlym" typeface="Kartika"/>
+        <a:font script="Laoo" typeface="DokChampa"/>
+        <a:font script="Sinh" typeface="Iskoola Pota"/>
+        <a:font script="Mong" typeface="Mongolian Baiti"/>
+        <a:font script="Viet" typeface="Times New Roman"/>
+        <a:font script="Uigh" typeface="Microsoft Uighur"/>
+        <a:font script="Geor" typeface="Sylfaen"/>
+        <a:font script="Armn" typeface="Arial"/>
+        <a:font script="Bugi" typeface="Leelawadee UI"/>
+        <a:font script="Bopo" typeface="Microsoft JhengHei"/>
+        <a:font script="Java" typeface="Javanese Text"/>
+        <a:font script="Lisu" typeface="Segoe UI"/>
+        <a:font script="Mymr" typeface="Myanmar Text"/>
+        <a:font script="Nkoo" typeface="Ebrima"/>
+        <a:font script="Olck" typeface="Nirmala UI"/>
+        <a:font script="Osma" typeface="Ebrima"/>
+        <a:font script="Phag" typeface="Phagspa"/>
+        <a:font script="Syrn" typeface="Estrangelo Edessa"/>
+        <a:font script="Syrj" typeface="Estrangelo Edessa"/>
+        <a:font script="Syre" typeface="Estrangelo Edessa"/>
+        <a:font script="Sora" typeface="Nirmala UI"/>
+        <a:font script="Tale" typeface="Microsoft Tai Le"/>
+        <a:font script="Talu" typeface="Microsoft New Tai Lue"/>
+        <a:font script="Tfng" typeface="Ebrima"/>
+      </a:majorFont>
+      <a:minorFont>
+        <a:latin typeface="Calibri" panose="020F0502020204030204"/>
+        <a:ea typeface=""/>
+        <a:cs typeface=""/>
+        <a:font script="Jpan" typeface="游ゴシック"/>
+        <a:font script="Hang" typeface="맑은 고딕"/>
+        <a:font script="Hans" typeface="等线"/>
+        <a:font script="Hant" typeface="新細明體"/>
+        <a:font script="Arab" typeface="Arial"/>
+        <a:font script="Hebr" typeface="Arial"/>
+        <a:font script="Thai" typeface="Cordia New"/>
+        <a:font script="Ethi" typeface="Nyala"/>
+        <a:font script="Beng" typeface="Vrinda"/>
+        <a:font script="Gujr" typeface="Shruti"/>
+        <a:font script="Khmr" typeface="DaunPenh"/>
+        <a:font script="Knda" typeface="Tunga"/>
+        <a:font script="Guru" typeface="Raavi"/>
+        <a:font script="Cans" typeface="Euphemia"/>
+        <a:font script="Cher" typeface="Plantagenet Cherokee"/>
+        <a:font script="Yiii" typeface="Microsoft Yi Baiti"/>
+        <a:font script="Tibt" typeface="Microsoft Himalaya"/>
+        <a:font script="Thaa" typeface="MV Boli"/>
+        <a:font script="Deva" typeface="Mangal"/>
+        <a:font script="Telu" typeface="Gautami"/>
+        <a:font script="Taml" typeface="Latha"/>
+        <a:font script="Syrc" typeface="Estrangelo Edessa"/>
+        <a:font script="Orya" typeface="Kalinga"/>
+        <a:font script="Mlym" typeface="Kartika"/>
+        <a:font script="Laoo" typeface="DokChampa"/>
+        <a:font script="Sinh" typeface="Iskoola Pota"/>
+        <a:font script="Mong" typeface="Mongolian Baiti"/>
+        <a:font script="Viet" typeface="Arial"/>
+        <a:font script="Uigh" typeface="Microsoft Uighur"/>
+        <a:font script="Geor" typeface="Sylfaen"/>
+        <a:font script="Armn" typeface="Arial"/>
+        <a:font script="Bugi" typeface="Leelawadee UI"/>
+        <a:font script="Bopo" typeface="Microsoft JhengHei"/>
+        <a:font script="Java" typeface="Javanese Text"/>
+        <a:font script="Lisu" typeface="Segoe UI"/>
+        <a:font script="Mymr" typeface="Myanmar Text"/>
+        <a:font script="Nkoo" typeface="Ebrima"/>
+        <a:font script="Olck" typeface="Nirmala UI"/>
+        <a:font script="Osma" typeface="Ebrima"/>
+        <a:font script="Phag" typeface="Phagspa"/>
+        <a:font script="Syrn" typeface="Estrangelo Edessa"/>
+        <a:font script="Syrj" typeface="Estrangelo Edessa"/>
+        <a:font script="Syre" typeface="Estrangelo Edessa"/>
+        <a:font script="Sora" typeface="Nirmala UI"/>
+        <a:font script="Tale" typeface="Microsoft Tai Le"/>
+        <a:font script="Talu" typeface="Microsoft New Tai Lue"/>
+        <a:font script="Tfng" typeface="Ebrima"/>
+      </a:minorFont>
+    </a:fontScheme>
+    <a:fmtScheme name="Стандартная">
+      <a:fillStyleLst>
+        <a:solidFill>
+          <a:schemeClr val="phClr"/>
+        </a:solidFill>
+        <a:gradFill rotWithShape="1">
+          <a:gsLst>
+            <a:gs pos="0">
+              <a:schemeClr val="phClr">
+                <a:lumMod val="110000"/>
+                <a:satMod val="105000"/>
+                <a:tint val="67000"/>
+              </a:schemeClr>
+            </a:gs>
+            <a:gs pos="50000">
+              <a:schemeClr val="phClr">
+                <a:lumMod val="105000"/>
+                <a:satMod val="103000"/>
+                <a:tint val="73000"/>
+              </a:schemeClr>
+            </a:gs>
+            <a:gs pos="100000">
+              <a:schemeClr val="phClr">
+                <a:lumMod val="105000"/>
+                <a:satMod val="109000"/>
+                <a:tint val="81000"/>
+              </a:schemeClr>
+            </a:gs>
+          </a:gsLst>
+          <a:lin ang="5400000" scaled="0"/>
+        </a:gradFill>
+        <a:gradFill rotWithShape="1">
+          <a:gsLst>
+            <a:gs pos="0">
+              <a:schemeClr val="phClr">
+                <a:satMod val="103000"/>
+                <a:lumMod val="102000"/>
+                <a:tint val="94000"/>
+              </a:schemeClr>
+            </a:gs>
+            <a:gs pos="50000">
+              <a:schemeClr val="phClr">
+                <a:satMod val="110000"/>
+                <a:lumMod val="100000"/>
+                <a:shade val="100000"/>
+              </a:schemeClr>
+            </a:gs>
+            <a:gs pos="100000">
+              <a:schemeClr val="phClr">
+                <a:lumMod val="99000"/>
+                <a:satMod val="120000"/>
+                <a:shade val="78000"/>
+              </a:schemeClr>
+            </a:gs>
+          </a:gsLst>
+          <a:lin ang="5400000" scaled="0"/>
+        </a:gradFill>
+      </a:fillStyleLst>
+      <a:lnStyleLst>
+        <a:ln w="6350" cap="flat" cmpd="sng" algn="ctr">
+          <a:solidFill>
+            <a:schemeClr val="phClr"/>
+          </a:solidFill>
+          <a:prstDash val="solid"/>
+          <a:miter lim="800000"/>
+        </a:ln>
+        <a:ln w="12700" cap="flat" cmpd="sng" algn="ctr">
+          <a:solidFill>
+            <a:schemeClr val="phClr"/>
+          </a:solidFill>
+          <a:prstDash val="solid"/>
+          <a:miter lim="800000"/>
+        </a:ln>
+        <a:ln w="19050" cap="flat" cmpd="sng" algn="ctr">
+          <a:solidFill>
+            <a:schemeClr val="phClr"/>
+          </a:solidFill>
+          <a:prstDash val="solid"/>
+          <a:miter lim="800000"/>
+        </a:ln>
+      </a:lnStyleLst>
+      <a:effectStyleLst>
+        <a:effectStyle>
+          <a:effectLst/>
+        </a:effectStyle>
+        <a:effectStyle>
+          <a:effectLst/>
+        </a:effectStyle>
+        <a:effectStyle>
+          <a:effectLst>
+            <a:outerShdw blurRad="57150" dist="19050" dir="5400000" algn="ctr" rotWithShape="0">
+              <a:srgbClr val="000000">
+                <a:alpha val="63000"/>
+              </a:srgbClr>
+            </a:outerShdw>
+          </a:effectLst>
+        </a:effectStyle>
+      </a:effectStyleLst>
+      <a:bgFillStyleLst>
+        <a:solidFill>
+          <a:schemeClr val="phClr"/>
+        </a:solidFill>
+        <a:solidFill>
+          <a:schemeClr val="phClr">
+            <a:tint val="95000"/>
+            <a:satMod val="170000"/>
+          </a:schemeClr>
+        </a:solidFill>
+        <a:gradFill rotWithShape="1">
+          <a:gsLst>
+            <a:gs pos="0">
+              <a:schemeClr val="phClr">
+                <a:tint val="93000"/>
+                <a:satMod val="150000"/>
+                <a:shade val="98000"/>
+                <a:lumMod val="102000"/>
+              </a:schemeClr>
+            </a:gs>
+            <a:gs pos="50000">
+              <a:schemeClr val="phClr">
+                <a:tint val="98000"/>
+                <a:satMod val="130000"/>
+                <a:shade val="90000"/>
+                <a:lumMod val="103000"/>
+              </a:schemeClr>
+            </a:gs>
+            <a:gs pos="100000">
+              <a:schemeClr val="phClr">
+                <a:shade val="63000"/>
+                <a:satMod val="120000"/>
+              </a:schemeClr>
+            </a:gs>
+          </a:gsLst>
+          <a:lin ang="5400000" scaled="0"/>
+        </a:gradFill>
+      </a:bgFillStyleLst>
+    </a:fmtScheme>
+  </a:themeElements>
+  <a:objectDefaults/>
+  <a:extraClrSchemeLst/>
+  <a:extLst>
+    <a:ext uri="{05A4C25C-085E-4340-85A3-A5531E510DB2}">
+      <thm15:themeFamily xmlns:thm15="http://schemas.microsoft.com/office/thememl/2012/main" name="Office Theme" id="{62F939B6-93AF-4DB8-9C6B-D6C7DFDC589F}" vid="{4A3C46E8-61CC-4603-A589-7422A47A8E4A}"/>
+    </a:ext>
+  </a:extLst>
+</a:theme>
 </file>